--- a/Misc files/Capstone Diagrams.pptx
+++ b/Misc files/Capstone Diagrams.pptx
@@ -7,6 +7,12 @@
   <p:sldIdLst>
     <p:sldId id="256" r:id="rId2"/>
     <p:sldId id="257" r:id="rId3"/>
+    <p:sldId id="283" r:id="rId4"/>
+    <p:sldId id="258" r:id="rId5"/>
+    <p:sldId id="259" r:id="rId6"/>
+    <p:sldId id="284" r:id="rId7"/>
+    <p:sldId id="285" r:id="rId8"/>
+    <p:sldId id="286" r:id="rId9"/>
   </p:sldIdLst>
   <p:sldSz cx="12192000" cy="6858000"/>
   <p:notesSz cx="6858000" cy="9144000"/>
@@ -952,7 +958,7 @@
           <a:p>
             <a:fld id="{20590B20-513A-4C6A-B322-257A1529B471}" type="datetimeFigureOut">
               <a:rPr lang="en-US" smtClean="0"/>
-              <a:t>4/8/2026</a:t>
+              <a:t>5/29/2026</a:t>
             </a:fld>
             <a:endParaRPr lang="en-US"/>
           </a:p>
@@ -1150,7 +1156,7 @@
           <a:p>
             <a:fld id="{20590B20-513A-4C6A-B322-257A1529B471}" type="datetimeFigureOut">
               <a:rPr lang="en-US" smtClean="0"/>
-              <a:t>4/8/2026</a:t>
+              <a:t>5/29/2026</a:t>
             </a:fld>
             <a:endParaRPr lang="en-US"/>
           </a:p>
@@ -1358,7 +1364,7 @@
           <a:p>
             <a:fld id="{20590B20-513A-4C6A-B322-257A1529B471}" type="datetimeFigureOut">
               <a:rPr lang="en-US" smtClean="0"/>
-              <a:t>4/8/2026</a:t>
+              <a:t>5/29/2026</a:t>
             </a:fld>
             <a:endParaRPr lang="en-US"/>
           </a:p>
@@ -1556,7 +1562,7 @@
           <a:p>
             <a:fld id="{20590B20-513A-4C6A-B322-257A1529B471}" type="datetimeFigureOut">
               <a:rPr lang="en-US" smtClean="0"/>
-              <a:t>4/8/2026</a:t>
+              <a:t>5/29/2026</a:t>
             </a:fld>
             <a:endParaRPr lang="en-US"/>
           </a:p>
@@ -1831,7 +1837,7 @@
           <a:p>
             <a:fld id="{20590B20-513A-4C6A-B322-257A1529B471}" type="datetimeFigureOut">
               <a:rPr lang="en-US" smtClean="0"/>
-              <a:t>4/8/2026</a:t>
+              <a:t>5/29/2026</a:t>
             </a:fld>
             <a:endParaRPr lang="en-US"/>
           </a:p>
@@ -2096,7 +2102,7 @@
           <a:p>
             <a:fld id="{20590B20-513A-4C6A-B322-257A1529B471}" type="datetimeFigureOut">
               <a:rPr lang="en-US" smtClean="0"/>
-              <a:t>4/8/2026</a:t>
+              <a:t>5/29/2026</a:t>
             </a:fld>
             <a:endParaRPr lang="en-US"/>
           </a:p>
@@ -2508,7 +2514,7 @@
           <a:p>
             <a:fld id="{20590B20-513A-4C6A-B322-257A1529B471}" type="datetimeFigureOut">
               <a:rPr lang="en-US" smtClean="0"/>
-              <a:t>4/8/2026</a:t>
+              <a:t>5/29/2026</a:t>
             </a:fld>
             <a:endParaRPr lang="en-US"/>
           </a:p>
@@ -2649,7 +2655,7 @@
           <a:p>
             <a:fld id="{20590B20-513A-4C6A-B322-257A1529B471}" type="datetimeFigureOut">
               <a:rPr lang="en-US" smtClean="0"/>
-              <a:t>4/8/2026</a:t>
+              <a:t>5/29/2026</a:t>
             </a:fld>
             <a:endParaRPr lang="en-US"/>
           </a:p>
@@ -2762,7 +2768,7 @@
           <a:p>
             <a:fld id="{20590B20-513A-4C6A-B322-257A1529B471}" type="datetimeFigureOut">
               <a:rPr lang="en-US" smtClean="0"/>
-              <a:t>4/8/2026</a:t>
+              <a:t>5/29/2026</a:t>
             </a:fld>
             <a:endParaRPr lang="en-US"/>
           </a:p>
@@ -3073,7 +3079,7 @@
           <a:p>
             <a:fld id="{20590B20-513A-4C6A-B322-257A1529B471}" type="datetimeFigureOut">
               <a:rPr lang="en-US" smtClean="0"/>
-              <a:t>4/8/2026</a:t>
+              <a:t>5/29/2026</a:t>
             </a:fld>
             <a:endParaRPr lang="en-US"/>
           </a:p>
@@ -3361,7 +3367,7 @@
           <a:p>
             <a:fld id="{20590B20-513A-4C6A-B322-257A1529B471}" type="datetimeFigureOut">
               <a:rPr lang="en-US" smtClean="0"/>
-              <a:t>4/8/2026</a:t>
+              <a:t>5/29/2026</a:t>
             </a:fld>
             <a:endParaRPr lang="en-US"/>
           </a:p>
@@ -3602,7 +3608,7 @@
           <a:p>
             <a:fld id="{20590B20-513A-4C6A-B322-257A1529B471}" type="datetimeFigureOut">
               <a:rPr lang="en-US" smtClean="0"/>
-              <a:t>4/8/2026</a:t>
+              <a:t>5/29/2026</a:t>
             </a:fld>
             <a:endParaRPr lang="en-US"/>
           </a:p>
@@ -5953,6 +5959,4016 @@
     <p:extLst>
       <p:ext uri="{BB962C8B-B14F-4D97-AF65-F5344CB8AC3E}">
         <p14:creationId xmlns:p14="http://schemas.microsoft.com/office/powerpoint/2010/main" val="3741657483"/>
+      </p:ext>
+    </p:extLst>
+  </p:cSld>
+  <p:clrMapOvr>
+    <a:masterClrMapping/>
+  </p:clrMapOvr>
+</p:sld>
+</file>
+
+<file path=ppt/slides/slide3.xml><?xml version="1.0" encoding="utf-8"?>
+<p:sld xmlns:a="http://schemas.openxmlformats.org/drawingml/2006/main" xmlns:r="http://schemas.openxmlformats.org/officeDocument/2006/relationships" xmlns:p="http://schemas.openxmlformats.org/presentationml/2006/main">
+  <p:cSld>
+    <p:spTree>
+      <p:nvGrpSpPr>
+        <p:cNvPr id="1" name="">
+          <a:extLst>
+            <a:ext uri="{FF2B5EF4-FFF2-40B4-BE49-F238E27FC236}">
+              <a16:creationId xmlns:a16="http://schemas.microsoft.com/office/drawing/2014/main" id="{7B5F9A59-EDB1-9965-5161-8972E6A6E82D}"/>
+            </a:ext>
+          </a:extLst>
+        </p:cNvPr>
+        <p:cNvGrpSpPr/>
+        <p:nvPr/>
+      </p:nvGrpSpPr>
+      <p:grpSpPr>
+        <a:xfrm>
+          <a:off x="0" y="0"/>
+          <a:ext cx="0" cy="0"/>
+          <a:chOff x="0" y="0"/>
+          <a:chExt cx="0" cy="0"/>
+        </a:xfrm>
+      </p:grpSpPr>
+      <p:sp>
+        <p:nvSpPr>
+          <p:cNvPr id="2" name="Title 1">
+            <a:extLst>
+              <a:ext uri="{FF2B5EF4-FFF2-40B4-BE49-F238E27FC236}">
+                <a16:creationId xmlns:a16="http://schemas.microsoft.com/office/drawing/2014/main" id="{4043C530-C6C0-32B3-41BA-5EE8E494F655}"/>
+              </a:ext>
+            </a:extLst>
+          </p:cNvPr>
+          <p:cNvSpPr>
+            <a:spLocks noGrp="1"/>
+          </p:cNvSpPr>
+          <p:nvPr>
+            <p:ph type="title"/>
+          </p:nvPr>
+        </p:nvSpPr>
+        <p:spPr>
+          <a:xfrm>
+            <a:off x="-1363606" y="837995"/>
+            <a:ext cx="7015181" cy="990017"/>
+          </a:xfrm>
+        </p:spPr>
+        <p:txBody>
+          <a:bodyPr anchor="b">
+            <a:normAutofit/>
+          </a:bodyPr>
+          <a:lstStyle/>
+          <a:p>
+            <a:pPr algn="r"/>
+            <a:r>
+              <a:rPr lang="en-US" dirty="0">
+                <a:solidFill>
+                  <a:schemeClr val="bg1"/>
+                </a:solidFill>
+              </a:rPr>
+              <a:t>CAF</a:t>
+            </a:r>
+          </a:p>
+        </p:txBody>
+      </p:sp>
+      <p:sp>
+        <p:nvSpPr>
+          <p:cNvPr id="20" name="Content Placeholder 2">
+            <a:extLst>
+              <a:ext uri="{FF2B5EF4-FFF2-40B4-BE49-F238E27FC236}">
+                <a16:creationId xmlns:a16="http://schemas.microsoft.com/office/drawing/2014/main" id="{94A05FA7-461D-45A8-EF6C-D907C2EEDBF8}"/>
+              </a:ext>
+            </a:extLst>
+          </p:cNvPr>
+          <p:cNvSpPr txBox="1">
+            <a:spLocks/>
+          </p:cNvSpPr>
+          <p:nvPr/>
+        </p:nvSpPr>
+        <p:spPr>
+          <a:xfrm>
+            <a:off x="176582" y="2339862"/>
+            <a:ext cx="6341728" cy="4107656"/>
+          </a:xfrm>
+          <a:prstGeom prst="rect">
+            <a:avLst/>
+          </a:prstGeom>
+        </p:spPr>
+        <p:txBody>
+          <a:bodyPr vert="horz" lIns="91440" tIns="45720" rIns="91440" bIns="45720" rtlCol="0">
+            <a:normAutofit/>
+          </a:bodyPr>
+          <a:lstStyle>
+            <a:lvl1pPr marL="228600" indent="-228600" algn="l" defTabSz="914400" rtl="0" eaLnBrk="1" latinLnBrk="0" hangingPunct="1">
+              <a:lnSpc>
+                <a:spcPct val="90000"/>
+              </a:lnSpc>
+              <a:spcBef>
+                <a:spcPts val="1000"/>
+              </a:spcBef>
+              <a:buFont typeface="Arial" panose="020B0604020202020204" pitchFamily="34" charset="0"/>
+              <a:buChar char="•"/>
+              <a:defRPr sz="2800" kern="1200">
+                <a:solidFill>
+                  <a:schemeClr val="tx1"/>
+                </a:solidFill>
+                <a:latin typeface="+mn-lt"/>
+                <a:ea typeface="+mn-ea"/>
+                <a:cs typeface="+mn-cs"/>
+              </a:defRPr>
+            </a:lvl1pPr>
+            <a:lvl2pPr marL="685800" indent="-228600" algn="l" defTabSz="914400" rtl="0" eaLnBrk="1" latinLnBrk="0" hangingPunct="1">
+              <a:lnSpc>
+                <a:spcPct val="90000"/>
+              </a:lnSpc>
+              <a:spcBef>
+                <a:spcPts val="500"/>
+              </a:spcBef>
+              <a:buFont typeface="Arial" panose="020B0604020202020204" pitchFamily="34" charset="0"/>
+              <a:buChar char="•"/>
+              <a:defRPr sz="2400" kern="1200">
+                <a:solidFill>
+                  <a:schemeClr val="tx1"/>
+                </a:solidFill>
+                <a:latin typeface="+mn-lt"/>
+                <a:ea typeface="+mn-ea"/>
+                <a:cs typeface="+mn-cs"/>
+              </a:defRPr>
+            </a:lvl2pPr>
+            <a:lvl3pPr marL="1143000" indent="-228600" algn="l" defTabSz="914400" rtl="0" eaLnBrk="1" latinLnBrk="0" hangingPunct="1">
+              <a:lnSpc>
+                <a:spcPct val="90000"/>
+              </a:lnSpc>
+              <a:spcBef>
+                <a:spcPts val="500"/>
+              </a:spcBef>
+              <a:buFont typeface="Arial" panose="020B0604020202020204" pitchFamily="34" charset="0"/>
+              <a:buChar char="•"/>
+              <a:defRPr sz="2000" kern="1200">
+                <a:solidFill>
+                  <a:schemeClr val="tx1"/>
+                </a:solidFill>
+                <a:latin typeface="+mn-lt"/>
+                <a:ea typeface="+mn-ea"/>
+                <a:cs typeface="+mn-cs"/>
+              </a:defRPr>
+            </a:lvl3pPr>
+            <a:lvl4pPr marL="1600200" indent="-228600" algn="l" defTabSz="914400" rtl="0" eaLnBrk="1" latinLnBrk="0" hangingPunct="1">
+              <a:lnSpc>
+                <a:spcPct val="90000"/>
+              </a:lnSpc>
+              <a:spcBef>
+                <a:spcPts val="500"/>
+              </a:spcBef>
+              <a:buFont typeface="Arial" panose="020B0604020202020204" pitchFamily="34" charset="0"/>
+              <a:buChar char="•"/>
+              <a:defRPr sz="1800" kern="1200">
+                <a:solidFill>
+                  <a:schemeClr val="tx1"/>
+                </a:solidFill>
+                <a:latin typeface="+mn-lt"/>
+                <a:ea typeface="+mn-ea"/>
+                <a:cs typeface="+mn-cs"/>
+              </a:defRPr>
+            </a:lvl4pPr>
+            <a:lvl5pPr marL="2057400" indent="-228600" algn="l" defTabSz="914400" rtl="0" eaLnBrk="1" latinLnBrk="0" hangingPunct="1">
+              <a:lnSpc>
+                <a:spcPct val="90000"/>
+              </a:lnSpc>
+              <a:spcBef>
+                <a:spcPts val="500"/>
+              </a:spcBef>
+              <a:buFont typeface="Arial" panose="020B0604020202020204" pitchFamily="34" charset="0"/>
+              <a:buChar char="•"/>
+              <a:defRPr sz="1800" kern="1200">
+                <a:solidFill>
+                  <a:schemeClr val="tx1"/>
+                </a:solidFill>
+                <a:latin typeface="+mn-lt"/>
+                <a:ea typeface="+mn-ea"/>
+                <a:cs typeface="+mn-cs"/>
+              </a:defRPr>
+            </a:lvl5pPr>
+            <a:lvl6pPr marL="2514600" indent="-228600" algn="l" defTabSz="914400" rtl="0" eaLnBrk="1" latinLnBrk="0" hangingPunct="1">
+              <a:lnSpc>
+                <a:spcPct val="90000"/>
+              </a:lnSpc>
+              <a:spcBef>
+                <a:spcPts val="500"/>
+              </a:spcBef>
+              <a:buFont typeface="Arial" panose="020B0604020202020204" pitchFamily="34" charset="0"/>
+              <a:buChar char="•"/>
+              <a:defRPr sz="1800" kern="1200">
+                <a:solidFill>
+                  <a:schemeClr val="tx1"/>
+                </a:solidFill>
+                <a:latin typeface="+mn-lt"/>
+                <a:ea typeface="+mn-ea"/>
+                <a:cs typeface="+mn-cs"/>
+              </a:defRPr>
+            </a:lvl6pPr>
+            <a:lvl7pPr marL="2971800" indent="-228600" algn="l" defTabSz="914400" rtl="0" eaLnBrk="1" latinLnBrk="0" hangingPunct="1">
+              <a:lnSpc>
+                <a:spcPct val="90000"/>
+              </a:lnSpc>
+              <a:spcBef>
+                <a:spcPts val="500"/>
+              </a:spcBef>
+              <a:buFont typeface="Arial" panose="020B0604020202020204" pitchFamily="34" charset="0"/>
+              <a:buChar char="•"/>
+              <a:defRPr sz="1800" kern="1200">
+                <a:solidFill>
+                  <a:schemeClr val="tx1"/>
+                </a:solidFill>
+                <a:latin typeface="+mn-lt"/>
+                <a:ea typeface="+mn-ea"/>
+                <a:cs typeface="+mn-cs"/>
+              </a:defRPr>
+            </a:lvl7pPr>
+            <a:lvl8pPr marL="3429000" indent="-228600" algn="l" defTabSz="914400" rtl="0" eaLnBrk="1" latinLnBrk="0" hangingPunct="1">
+              <a:lnSpc>
+                <a:spcPct val="90000"/>
+              </a:lnSpc>
+              <a:spcBef>
+                <a:spcPts val="500"/>
+              </a:spcBef>
+              <a:buFont typeface="Arial" panose="020B0604020202020204" pitchFamily="34" charset="0"/>
+              <a:buChar char="•"/>
+              <a:defRPr sz="1800" kern="1200">
+                <a:solidFill>
+                  <a:schemeClr val="tx1"/>
+                </a:solidFill>
+                <a:latin typeface="+mn-lt"/>
+                <a:ea typeface="+mn-ea"/>
+                <a:cs typeface="+mn-cs"/>
+              </a:defRPr>
+            </a:lvl8pPr>
+            <a:lvl9pPr marL="3886200" indent="-228600" algn="l" defTabSz="914400" rtl="0" eaLnBrk="1" latinLnBrk="0" hangingPunct="1">
+              <a:lnSpc>
+                <a:spcPct val="90000"/>
+              </a:lnSpc>
+              <a:spcBef>
+                <a:spcPts val="500"/>
+              </a:spcBef>
+              <a:buFont typeface="Arial" panose="020B0604020202020204" pitchFamily="34" charset="0"/>
+              <a:buChar char="•"/>
+              <a:defRPr sz="1800" kern="1200">
+                <a:solidFill>
+                  <a:schemeClr val="tx1"/>
+                </a:solidFill>
+                <a:latin typeface="+mn-lt"/>
+                <a:ea typeface="+mn-ea"/>
+                <a:cs typeface="+mn-cs"/>
+              </a:defRPr>
+            </a:lvl9pPr>
+          </a:lstStyle>
+          <a:p>
+            <a:pPr lvl="1">
+              <a:lnSpc>
+                <a:spcPct val="100000"/>
+              </a:lnSpc>
+            </a:pPr>
+            <a:endParaRPr lang="en-US" sz="1800" dirty="0">
+              <a:solidFill>
+                <a:schemeClr val="bg1"/>
+              </a:solidFill>
+            </a:endParaRPr>
+          </a:p>
+          <a:p>
+            <a:pPr marL="457200" lvl="1" indent="0">
+              <a:buFont typeface="Arial" panose="020B0604020202020204" pitchFamily="34" charset="0"/>
+              <a:buNone/>
+            </a:pPr>
+            <a:endParaRPr lang="en-US" sz="2000" dirty="0">
+              <a:solidFill>
+                <a:schemeClr val="bg1"/>
+              </a:solidFill>
+            </a:endParaRPr>
+          </a:p>
+        </p:txBody>
+      </p:sp>
+      <p:pic>
+        <p:nvPicPr>
+          <p:cNvPr id="5" name="Picture 4">
+            <a:extLst>
+              <a:ext uri="{FF2B5EF4-FFF2-40B4-BE49-F238E27FC236}">
+                <a16:creationId xmlns:a16="http://schemas.microsoft.com/office/drawing/2014/main" id="{965C046A-BD8C-C07B-BC8E-61F68B7BD8CB}"/>
+              </a:ext>
+            </a:extLst>
+          </p:cNvPr>
+          <p:cNvPicPr>
+            <a:picLocks noChangeAspect="1"/>
+          </p:cNvPicPr>
+          <p:nvPr/>
+        </p:nvPicPr>
+        <p:blipFill>
+          <a:blip r:embed="rId2">
+            <a:extLst>
+              <a:ext uri="{28A0092B-C50C-407E-A947-70E740481C1C}">
+                <a14:useLocalDpi xmlns:a14="http://schemas.microsoft.com/office/drawing/2010/main" val="0"/>
+              </a:ext>
+            </a:extLst>
+          </a:blip>
+          <a:stretch>
+            <a:fillRect/>
+          </a:stretch>
+        </p:blipFill>
+        <p:spPr>
+          <a:xfrm>
+            <a:off x="573593" y="2224669"/>
+            <a:ext cx="2585742" cy="1939307"/>
+          </a:xfrm>
+          <a:prstGeom prst="rect">
+            <a:avLst/>
+          </a:prstGeom>
+        </p:spPr>
+      </p:pic>
+      <p:pic>
+        <p:nvPicPr>
+          <p:cNvPr id="7" name="Picture 6">
+            <a:extLst>
+              <a:ext uri="{FF2B5EF4-FFF2-40B4-BE49-F238E27FC236}">
+                <a16:creationId xmlns:a16="http://schemas.microsoft.com/office/drawing/2014/main" id="{1ED08407-485F-25C8-A1EA-0F32ED6936EE}"/>
+              </a:ext>
+            </a:extLst>
+          </p:cNvPr>
+          <p:cNvPicPr>
+            <a:picLocks noChangeAspect="1"/>
+          </p:cNvPicPr>
+          <p:nvPr/>
+        </p:nvPicPr>
+        <p:blipFill>
+          <a:blip r:embed="rId3">
+            <a:extLst>
+              <a:ext uri="{28A0092B-C50C-407E-A947-70E740481C1C}">
+                <a14:useLocalDpi xmlns:a14="http://schemas.microsoft.com/office/drawing/2010/main" val="0"/>
+              </a:ext>
+            </a:extLst>
+          </a:blip>
+          <a:stretch>
+            <a:fillRect/>
+          </a:stretch>
+        </p:blipFill>
+        <p:spPr>
+          <a:xfrm>
+            <a:off x="3330823" y="2224669"/>
+            <a:ext cx="2585743" cy="1939307"/>
+          </a:xfrm>
+          <a:prstGeom prst="rect">
+            <a:avLst/>
+          </a:prstGeom>
+        </p:spPr>
+      </p:pic>
+      <p:pic>
+        <p:nvPicPr>
+          <p:cNvPr id="11" name="Picture 10">
+            <a:extLst>
+              <a:ext uri="{FF2B5EF4-FFF2-40B4-BE49-F238E27FC236}">
+                <a16:creationId xmlns:a16="http://schemas.microsoft.com/office/drawing/2014/main" id="{3FE75C2B-A374-7E03-157A-68B2F7E88673}"/>
+              </a:ext>
+            </a:extLst>
+          </p:cNvPr>
+          <p:cNvPicPr>
+            <a:picLocks noChangeAspect="1"/>
+          </p:cNvPicPr>
+          <p:nvPr/>
+        </p:nvPicPr>
+        <p:blipFill>
+          <a:blip r:embed="rId4">
+            <a:extLst>
+              <a:ext uri="{28A0092B-C50C-407E-A947-70E740481C1C}">
+                <a14:useLocalDpi xmlns:a14="http://schemas.microsoft.com/office/drawing/2010/main" val="0"/>
+              </a:ext>
+            </a:extLst>
+          </a:blip>
+          <a:stretch>
+            <a:fillRect/>
+          </a:stretch>
+        </p:blipFill>
+        <p:spPr>
+          <a:xfrm>
+            <a:off x="6088054" y="2224669"/>
+            <a:ext cx="2585740" cy="1939306"/>
+          </a:xfrm>
+          <a:prstGeom prst="rect">
+            <a:avLst/>
+          </a:prstGeom>
+        </p:spPr>
+      </p:pic>
+      <p:pic>
+        <p:nvPicPr>
+          <p:cNvPr id="14" name="Picture 13">
+            <a:extLst>
+              <a:ext uri="{FF2B5EF4-FFF2-40B4-BE49-F238E27FC236}">
+                <a16:creationId xmlns:a16="http://schemas.microsoft.com/office/drawing/2014/main" id="{E2E8D1EC-8FE8-5EDC-F1A0-291D3F30935A}"/>
+              </a:ext>
+            </a:extLst>
+          </p:cNvPr>
+          <p:cNvPicPr>
+            <a:picLocks noChangeAspect="1"/>
+          </p:cNvPicPr>
+          <p:nvPr/>
+        </p:nvPicPr>
+        <p:blipFill>
+          <a:blip r:embed="rId5">
+            <a:extLst>
+              <a:ext uri="{28A0092B-C50C-407E-A947-70E740481C1C}">
+                <a14:useLocalDpi xmlns:a14="http://schemas.microsoft.com/office/drawing/2010/main" val="0"/>
+              </a:ext>
+            </a:extLst>
+          </a:blip>
+          <a:stretch>
+            <a:fillRect/>
+          </a:stretch>
+        </p:blipFill>
+        <p:spPr>
+          <a:xfrm>
+            <a:off x="8845282" y="2224669"/>
+            <a:ext cx="2585742" cy="1939306"/>
+          </a:xfrm>
+          <a:prstGeom prst="rect">
+            <a:avLst/>
+          </a:prstGeom>
+        </p:spPr>
+      </p:pic>
+      <p:pic>
+        <p:nvPicPr>
+          <p:cNvPr id="16" name="Picture 15">
+            <a:extLst>
+              <a:ext uri="{FF2B5EF4-FFF2-40B4-BE49-F238E27FC236}">
+                <a16:creationId xmlns:a16="http://schemas.microsoft.com/office/drawing/2014/main" id="{5F3D7CB9-D20E-1B63-1CDF-C8F7BD2F732C}"/>
+              </a:ext>
+            </a:extLst>
+          </p:cNvPr>
+          <p:cNvPicPr>
+            <a:picLocks noChangeAspect="1"/>
+          </p:cNvPicPr>
+          <p:nvPr/>
+        </p:nvPicPr>
+        <p:blipFill>
+          <a:blip r:embed="rId6">
+            <a:extLst>
+              <a:ext uri="{28A0092B-C50C-407E-A947-70E740481C1C}">
+                <a14:useLocalDpi xmlns:a14="http://schemas.microsoft.com/office/drawing/2010/main" val="0"/>
+              </a:ext>
+            </a:extLst>
+          </a:blip>
+          <a:stretch>
+            <a:fillRect/>
+          </a:stretch>
+        </p:blipFill>
+        <p:spPr>
+          <a:xfrm>
+            <a:off x="6096000" y="4393690"/>
+            <a:ext cx="2585742" cy="1939307"/>
+          </a:xfrm>
+          <a:prstGeom prst="rect">
+            <a:avLst/>
+          </a:prstGeom>
+        </p:spPr>
+      </p:pic>
+      <p:pic>
+        <p:nvPicPr>
+          <p:cNvPr id="18" name="Picture 17">
+            <a:extLst>
+              <a:ext uri="{FF2B5EF4-FFF2-40B4-BE49-F238E27FC236}">
+                <a16:creationId xmlns:a16="http://schemas.microsoft.com/office/drawing/2014/main" id="{78E180AB-1630-CC93-2901-A35BC9D0C488}"/>
+              </a:ext>
+            </a:extLst>
+          </p:cNvPr>
+          <p:cNvPicPr>
+            <a:picLocks noChangeAspect="1"/>
+          </p:cNvPicPr>
+          <p:nvPr/>
+        </p:nvPicPr>
+        <p:blipFill>
+          <a:blip r:embed="rId7">
+            <a:extLst>
+              <a:ext uri="{28A0092B-C50C-407E-A947-70E740481C1C}">
+                <a14:useLocalDpi xmlns:a14="http://schemas.microsoft.com/office/drawing/2010/main" val="0"/>
+              </a:ext>
+            </a:extLst>
+          </a:blip>
+          <a:stretch>
+            <a:fillRect/>
+          </a:stretch>
+        </p:blipFill>
+        <p:spPr>
+          <a:xfrm>
+            <a:off x="8845284" y="4393692"/>
+            <a:ext cx="2585740" cy="1939305"/>
+          </a:xfrm>
+          <a:prstGeom prst="rect">
+            <a:avLst/>
+          </a:prstGeom>
+        </p:spPr>
+      </p:pic>
+      <p:sp>
+        <p:nvSpPr>
+          <p:cNvPr id="19" name="Content Placeholder 2">
+            <a:extLst>
+              <a:ext uri="{FF2B5EF4-FFF2-40B4-BE49-F238E27FC236}">
+                <a16:creationId xmlns:a16="http://schemas.microsoft.com/office/drawing/2014/main" id="{08450950-2DD0-B24D-12B6-6B816BBD23ED}"/>
+              </a:ext>
+            </a:extLst>
+          </p:cNvPr>
+          <p:cNvSpPr txBox="1">
+            <a:spLocks/>
+          </p:cNvSpPr>
+          <p:nvPr/>
+        </p:nvSpPr>
+        <p:spPr>
+          <a:xfrm>
+            <a:off x="50376" y="4414556"/>
+            <a:ext cx="5825124" cy="2187893"/>
+          </a:xfrm>
+          <a:prstGeom prst="rect">
+            <a:avLst/>
+          </a:prstGeom>
+        </p:spPr>
+        <p:txBody>
+          <a:bodyPr vert="horz" lIns="91440" tIns="45720" rIns="91440" bIns="45720" rtlCol="0">
+            <a:normAutofit/>
+          </a:bodyPr>
+          <a:lstStyle>
+            <a:lvl1pPr marL="228600" indent="-228600" algn="l" defTabSz="914400" rtl="0" eaLnBrk="1" latinLnBrk="0" hangingPunct="1">
+              <a:lnSpc>
+                <a:spcPct val="90000"/>
+              </a:lnSpc>
+              <a:spcBef>
+                <a:spcPts val="1000"/>
+              </a:spcBef>
+              <a:buFont typeface="Arial" panose="020B0604020202020204" pitchFamily="34" charset="0"/>
+              <a:buChar char="•"/>
+              <a:defRPr sz="2800" kern="1200">
+                <a:solidFill>
+                  <a:schemeClr val="tx1"/>
+                </a:solidFill>
+                <a:latin typeface="+mn-lt"/>
+                <a:ea typeface="+mn-ea"/>
+                <a:cs typeface="+mn-cs"/>
+              </a:defRPr>
+            </a:lvl1pPr>
+            <a:lvl2pPr marL="685800" indent="-228600" algn="l" defTabSz="914400" rtl="0" eaLnBrk="1" latinLnBrk="0" hangingPunct="1">
+              <a:lnSpc>
+                <a:spcPct val="90000"/>
+              </a:lnSpc>
+              <a:spcBef>
+                <a:spcPts val="500"/>
+              </a:spcBef>
+              <a:buFont typeface="Arial" panose="020B0604020202020204" pitchFamily="34" charset="0"/>
+              <a:buChar char="•"/>
+              <a:defRPr sz="2400" kern="1200">
+                <a:solidFill>
+                  <a:schemeClr val="tx1"/>
+                </a:solidFill>
+                <a:latin typeface="+mn-lt"/>
+                <a:ea typeface="+mn-ea"/>
+                <a:cs typeface="+mn-cs"/>
+              </a:defRPr>
+            </a:lvl2pPr>
+            <a:lvl3pPr marL="1143000" indent="-228600" algn="l" defTabSz="914400" rtl="0" eaLnBrk="1" latinLnBrk="0" hangingPunct="1">
+              <a:lnSpc>
+                <a:spcPct val="90000"/>
+              </a:lnSpc>
+              <a:spcBef>
+                <a:spcPts val="500"/>
+              </a:spcBef>
+              <a:buFont typeface="Arial" panose="020B0604020202020204" pitchFamily="34" charset="0"/>
+              <a:buChar char="•"/>
+              <a:defRPr sz="2000" kern="1200">
+                <a:solidFill>
+                  <a:schemeClr val="tx1"/>
+                </a:solidFill>
+                <a:latin typeface="+mn-lt"/>
+                <a:ea typeface="+mn-ea"/>
+                <a:cs typeface="+mn-cs"/>
+              </a:defRPr>
+            </a:lvl3pPr>
+            <a:lvl4pPr marL="1600200" indent="-228600" algn="l" defTabSz="914400" rtl="0" eaLnBrk="1" latinLnBrk="0" hangingPunct="1">
+              <a:lnSpc>
+                <a:spcPct val="90000"/>
+              </a:lnSpc>
+              <a:spcBef>
+                <a:spcPts val="500"/>
+              </a:spcBef>
+              <a:buFont typeface="Arial" panose="020B0604020202020204" pitchFamily="34" charset="0"/>
+              <a:buChar char="•"/>
+              <a:defRPr sz="1800" kern="1200">
+                <a:solidFill>
+                  <a:schemeClr val="tx1"/>
+                </a:solidFill>
+                <a:latin typeface="+mn-lt"/>
+                <a:ea typeface="+mn-ea"/>
+                <a:cs typeface="+mn-cs"/>
+              </a:defRPr>
+            </a:lvl4pPr>
+            <a:lvl5pPr marL="2057400" indent="-228600" algn="l" defTabSz="914400" rtl="0" eaLnBrk="1" latinLnBrk="0" hangingPunct="1">
+              <a:lnSpc>
+                <a:spcPct val="90000"/>
+              </a:lnSpc>
+              <a:spcBef>
+                <a:spcPts val="500"/>
+              </a:spcBef>
+              <a:buFont typeface="Arial" panose="020B0604020202020204" pitchFamily="34" charset="0"/>
+              <a:buChar char="•"/>
+              <a:defRPr sz="1800" kern="1200">
+                <a:solidFill>
+                  <a:schemeClr val="tx1"/>
+                </a:solidFill>
+                <a:latin typeface="+mn-lt"/>
+                <a:ea typeface="+mn-ea"/>
+                <a:cs typeface="+mn-cs"/>
+              </a:defRPr>
+            </a:lvl5pPr>
+            <a:lvl6pPr marL="2514600" indent="-228600" algn="l" defTabSz="914400" rtl="0" eaLnBrk="1" latinLnBrk="0" hangingPunct="1">
+              <a:lnSpc>
+                <a:spcPct val="90000"/>
+              </a:lnSpc>
+              <a:spcBef>
+                <a:spcPts val="500"/>
+              </a:spcBef>
+              <a:buFont typeface="Arial" panose="020B0604020202020204" pitchFamily="34" charset="0"/>
+              <a:buChar char="•"/>
+              <a:defRPr sz="1800" kern="1200">
+                <a:solidFill>
+                  <a:schemeClr val="tx1"/>
+                </a:solidFill>
+                <a:latin typeface="+mn-lt"/>
+                <a:ea typeface="+mn-ea"/>
+                <a:cs typeface="+mn-cs"/>
+              </a:defRPr>
+            </a:lvl6pPr>
+            <a:lvl7pPr marL="2971800" indent="-228600" algn="l" defTabSz="914400" rtl="0" eaLnBrk="1" latinLnBrk="0" hangingPunct="1">
+              <a:lnSpc>
+                <a:spcPct val="90000"/>
+              </a:lnSpc>
+              <a:spcBef>
+                <a:spcPts val="500"/>
+              </a:spcBef>
+              <a:buFont typeface="Arial" panose="020B0604020202020204" pitchFamily="34" charset="0"/>
+              <a:buChar char="•"/>
+              <a:defRPr sz="1800" kern="1200">
+                <a:solidFill>
+                  <a:schemeClr val="tx1"/>
+                </a:solidFill>
+                <a:latin typeface="+mn-lt"/>
+                <a:ea typeface="+mn-ea"/>
+                <a:cs typeface="+mn-cs"/>
+              </a:defRPr>
+            </a:lvl7pPr>
+            <a:lvl8pPr marL="3429000" indent="-228600" algn="l" defTabSz="914400" rtl="0" eaLnBrk="1" latinLnBrk="0" hangingPunct="1">
+              <a:lnSpc>
+                <a:spcPct val="90000"/>
+              </a:lnSpc>
+              <a:spcBef>
+                <a:spcPts val="500"/>
+              </a:spcBef>
+              <a:buFont typeface="Arial" panose="020B0604020202020204" pitchFamily="34" charset="0"/>
+              <a:buChar char="•"/>
+              <a:defRPr sz="1800" kern="1200">
+                <a:solidFill>
+                  <a:schemeClr val="tx1"/>
+                </a:solidFill>
+                <a:latin typeface="+mn-lt"/>
+                <a:ea typeface="+mn-ea"/>
+                <a:cs typeface="+mn-cs"/>
+              </a:defRPr>
+            </a:lvl8pPr>
+            <a:lvl9pPr marL="3886200" indent="-228600" algn="l" defTabSz="914400" rtl="0" eaLnBrk="1" latinLnBrk="0" hangingPunct="1">
+              <a:lnSpc>
+                <a:spcPct val="90000"/>
+              </a:lnSpc>
+              <a:spcBef>
+                <a:spcPts val="500"/>
+              </a:spcBef>
+              <a:buFont typeface="Arial" panose="020B0604020202020204" pitchFamily="34" charset="0"/>
+              <a:buChar char="•"/>
+              <a:defRPr sz="1800" kern="1200">
+                <a:solidFill>
+                  <a:schemeClr val="tx1"/>
+                </a:solidFill>
+                <a:latin typeface="+mn-lt"/>
+                <a:ea typeface="+mn-ea"/>
+                <a:cs typeface="+mn-cs"/>
+              </a:defRPr>
+            </a:lvl9pPr>
+          </a:lstStyle>
+          <a:p>
+            <a:pPr lvl="1">
+              <a:lnSpc>
+                <a:spcPct val="100000"/>
+              </a:lnSpc>
+            </a:pPr>
+            <a:r>
+              <a:rPr lang="en-US" sz="2000" dirty="0"/>
+              <a:t>Top SF 7 </a:t>
+            </a:r>
+          </a:p>
+          <a:p>
+            <a:pPr lvl="2">
+              <a:lnSpc>
+                <a:spcPct val="100000"/>
+              </a:lnSpc>
+            </a:pPr>
+            <a:r>
+              <a:rPr lang="en-US" sz="1600" dirty="0"/>
+              <a:t>(Left-right) BW 10.4k, BW 20k, BW 125k, BW 500k</a:t>
+            </a:r>
+            <a:endParaRPr lang="en-US" sz="1200" dirty="0"/>
+          </a:p>
+          <a:p>
+            <a:pPr lvl="1">
+              <a:lnSpc>
+                <a:spcPct val="100000"/>
+              </a:lnSpc>
+            </a:pPr>
+            <a:r>
+              <a:rPr lang="en-US" sz="2000" dirty="0"/>
+              <a:t>Bottom SF 12 </a:t>
+            </a:r>
+          </a:p>
+          <a:p>
+            <a:pPr lvl="2">
+              <a:lnSpc>
+                <a:spcPct val="100000"/>
+              </a:lnSpc>
+            </a:pPr>
+            <a:r>
+              <a:rPr lang="en-US" sz="1600" dirty="0"/>
+              <a:t>(Left-right) BW 125k, BW 500k</a:t>
+            </a:r>
+          </a:p>
+          <a:p>
+            <a:pPr lvl="1">
+              <a:lnSpc>
+                <a:spcPct val="100000"/>
+              </a:lnSpc>
+            </a:pPr>
+            <a:r>
+              <a:rPr lang="en-US" sz="1600" dirty="0"/>
+              <a:t>Bandwidth has much greater effect</a:t>
+            </a:r>
+          </a:p>
+          <a:p>
+            <a:pPr lvl="1">
+              <a:lnSpc>
+                <a:spcPct val="100000"/>
+              </a:lnSpc>
+            </a:pPr>
+            <a:r>
+              <a:rPr lang="en-US" sz="1600" dirty="0"/>
+              <a:t>Narrow BW is more difficult to pinpoint via </a:t>
+            </a:r>
+            <a:r>
+              <a:rPr lang="en-US" sz="1600" dirty="0" err="1"/>
+              <a:t>TDoA</a:t>
+            </a:r>
+            <a:r>
+              <a:rPr lang="en-US" sz="1600" dirty="0"/>
+              <a:t>/</a:t>
+            </a:r>
+            <a:r>
+              <a:rPr lang="en-US" sz="1600" dirty="0" err="1"/>
+              <a:t>FDoA</a:t>
+            </a:r>
+            <a:endParaRPr lang="en-US" sz="1600" dirty="0"/>
+          </a:p>
+          <a:p>
+            <a:pPr lvl="1">
+              <a:lnSpc>
+                <a:spcPct val="100000"/>
+              </a:lnSpc>
+            </a:pPr>
+            <a:endParaRPr lang="en-US" sz="1800" dirty="0">
+              <a:solidFill>
+                <a:schemeClr val="bg1"/>
+              </a:solidFill>
+            </a:endParaRPr>
+          </a:p>
+          <a:p>
+            <a:pPr marL="457200" lvl="1" indent="0">
+              <a:buFont typeface="Arial" panose="020B0604020202020204" pitchFamily="34" charset="0"/>
+              <a:buNone/>
+            </a:pPr>
+            <a:endParaRPr lang="en-US" sz="2000" dirty="0">
+              <a:solidFill>
+                <a:schemeClr val="bg1"/>
+              </a:solidFill>
+            </a:endParaRPr>
+          </a:p>
+        </p:txBody>
+      </p:sp>
+    </p:spTree>
+    <p:extLst>
+      <p:ext uri="{BB962C8B-B14F-4D97-AF65-F5344CB8AC3E}">
+        <p14:creationId xmlns:p14="http://schemas.microsoft.com/office/powerpoint/2010/main" val="3933279144"/>
+      </p:ext>
+    </p:extLst>
+  </p:cSld>
+  <p:clrMapOvr>
+    <a:masterClrMapping/>
+  </p:clrMapOvr>
+</p:sld>
+</file>
+
+<file path=ppt/slides/slide4.xml><?xml version="1.0" encoding="utf-8"?>
+<p:sld xmlns:a="http://schemas.openxmlformats.org/drawingml/2006/main" xmlns:r="http://schemas.openxmlformats.org/officeDocument/2006/relationships" xmlns:p="http://schemas.openxmlformats.org/presentationml/2006/main">
+  <p:cSld>
+    <p:spTree>
+      <p:nvGrpSpPr>
+        <p:cNvPr id="1" name=""/>
+        <p:cNvGrpSpPr/>
+        <p:nvPr/>
+      </p:nvGrpSpPr>
+      <p:grpSpPr>
+        <a:xfrm>
+          <a:off x="0" y="0"/>
+          <a:ext cx="0" cy="0"/>
+          <a:chOff x="0" y="0"/>
+          <a:chExt cx="0" cy="0"/>
+        </a:xfrm>
+      </p:grpSpPr>
+      <p:pic>
+        <p:nvPicPr>
+          <p:cNvPr id="5" name="Content Placeholder 4">
+            <a:extLst>
+              <a:ext uri="{FF2B5EF4-FFF2-40B4-BE49-F238E27FC236}">
+                <a16:creationId xmlns:a16="http://schemas.microsoft.com/office/drawing/2014/main" id="{439B0CD6-45AE-6065-C238-59405CCBF030}"/>
+              </a:ext>
+            </a:extLst>
+          </p:cNvPr>
+          <p:cNvPicPr>
+            <a:picLocks noGrp="1" noChangeAspect="1"/>
+          </p:cNvPicPr>
+          <p:nvPr>
+            <p:ph idx="1"/>
+          </p:nvPr>
+        </p:nvPicPr>
+        <p:blipFill>
+          <a:blip r:embed="rId2">
+            <a:extLst>
+              <a:ext uri="{28A0092B-C50C-407E-A947-70E740481C1C}">
+                <a14:useLocalDpi xmlns:a14="http://schemas.microsoft.com/office/drawing/2010/main" val="0"/>
+              </a:ext>
+            </a:extLst>
+          </a:blip>
+          <a:stretch>
+            <a:fillRect/>
+          </a:stretch>
+        </p:blipFill>
+        <p:spPr>
+          <a:xfrm>
+            <a:off x="140249" y="168051"/>
+            <a:ext cx="8695862" cy="6521897"/>
+          </a:xfrm>
+          <a:prstGeom prst="rect">
+            <a:avLst/>
+          </a:prstGeom>
+        </p:spPr>
+      </p:pic>
+      <p:sp>
+        <p:nvSpPr>
+          <p:cNvPr id="7" name="Content Placeholder 2">
+            <a:extLst>
+              <a:ext uri="{FF2B5EF4-FFF2-40B4-BE49-F238E27FC236}">
+                <a16:creationId xmlns:a16="http://schemas.microsoft.com/office/drawing/2014/main" id="{7BF880C4-6D10-D141-8A23-EAFD3F473CEB}"/>
+              </a:ext>
+            </a:extLst>
+          </p:cNvPr>
+          <p:cNvSpPr txBox="1">
+            <a:spLocks/>
+          </p:cNvSpPr>
+          <p:nvPr/>
+        </p:nvSpPr>
+        <p:spPr>
+          <a:xfrm>
+            <a:off x="8343790" y="1851768"/>
+            <a:ext cx="3535790" cy="2880251"/>
+          </a:xfrm>
+          <a:prstGeom prst="rect">
+            <a:avLst/>
+          </a:prstGeom>
+        </p:spPr>
+        <p:txBody>
+          <a:bodyPr vert="horz" lIns="91440" tIns="45720" rIns="91440" bIns="45720" rtlCol="0">
+            <a:normAutofit fontScale="55000" lnSpcReduction="20000"/>
+          </a:bodyPr>
+          <a:lstStyle>
+            <a:lvl1pPr marL="228600" indent="-228600" algn="l" defTabSz="914400" rtl="0" eaLnBrk="1" latinLnBrk="0" hangingPunct="1">
+              <a:lnSpc>
+                <a:spcPct val="90000"/>
+              </a:lnSpc>
+              <a:spcBef>
+                <a:spcPts val="1000"/>
+              </a:spcBef>
+              <a:buFont typeface="Arial" panose="020B0604020202020204" pitchFamily="34" charset="0"/>
+              <a:buChar char="•"/>
+              <a:defRPr sz="2800" kern="1200">
+                <a:solidFill>
+                  <a:schemeClr val="tx1"/>
+                </a:solidFill>
+                <a:latin typeface="+mn-lt"/>
+                <a:ea typeface="+mn-ea"/>
+                <a:cs typeface="+mn-cs"/>
+              </a:defRPr>
+            </a:lvl1pPr>
+            <a:lvl2pPr marL="685800" indent="-228600" algn="l" defTabSz="914400" rtl="0" eaLnBrk="1" latinLnBrk="0" hangingPunct="1">
+              <a:lnSpc>
+                <a:spcPct val="90000"/>
+              </a:lnSpc>
+              <a:spcBef>
+                <a:spcPts val="500"/>
+              </a:spcBef>
+              <a:buFont typeface="Arial" panose="020B0604020202020204" pitchFamily="34" charset="0"/>
+              <a:buChar char="•"/>
+              <a:defRPr sz="2400" kern="1200">
+                <a:solidFill>
+                  <a:schemeClr val="tx1"/>
+                </a:solidFill>
+                <a:latin typeface="+mn-lt"/>
+                <a:ea typeface="+mn-ea"/>
+                <a:cs typeface="+mn-cs"/>
+              </a:defRPr>
+            </a:lvl2pPr>
+            <a:lvl3pPr marL="1143000" indent="-228600" algn="l" defTabSz="914400" rtl="0" eaLnBrk="1" latinLnBrk="0" hangingPunct="1">
+              <a:lnSpc>
+                <a:spcPct val="90000"/>
+              </a:lnSpc>
+              <a:spcBef>
+                <a:spcPts val="500"/>
+              </a:spcBef>
+              <a:buFont typeface="Arial" panose="020B0604020202020204" pitchFamily="34" charset="0"/>
+              <a:buChar char="•"/>
+              <a:defRPr sz="2000" kern="1200">
+                <a:solidFill>
+                  <a:schemeClr val="tx1"/>
+                </a:solidFill>
+                <a:latin typeface="+mn-lt"/>
+                <a:ea typeface="+mn-ea"/>
+                <a:cs typeface="+mn-cs"/>
+              </a:defRPr>
+            </a:lvl3pPr>
+            <a:lvl4pPr marL="1600200" indent="-228600" algn="l" defTabSz="914400" rtl="0" eaLnBrk="1" latinLnBrk="0" hangingPunct="1">
+              <a:lnSpc>
+                <a:spcPct val="90000"/>
+              </a:lnSpc>
+              <a:spcBef>
+                <a:spcPts val="500"/>
+              </a:spcBef>
+              <a:buFont typeface="Arial" panose="020B0604020202020204" pitchFamily="34" charset="0"/>
+              <a:buChar char="•"/>
+              <a:defRPr sz="1800" kern="1200">
+                <a:solidFill>
+                  <a:schemeClr val="tx1"/>
+                </a:solidFill>
+                <a:latin typeface="+mn-lt"/>
+                <a:ea typeface="+mn-ea"/>
+                <a:cs typeface="+mn-cs"/>
+              </a:defRPr>
+            </a:lvl4pPr>
+            <a:lvl5pPr marL="2057400" indent="-228600" algn="l" defTabSz="914400" rtl="0" eaLnBrk="1" latinLnBrk="0" hangingPunct="1">
+              <a:lnSpc>
+                <a:spcPct val="90000"/>
+              </a:lnSpc>
+              <a:spcBef>
+                <a:spcPts val="500"/>
+              </a:spcBef>
+              <a:buFont typeface="Arial" panose="020B0604020202020204" pitchFamily="34" charset="0"/>
+              <a:buChar char="•"/>
+              <a:defRPr sz="1800" kern="1200">
+                <a:solidFill>
+                  <a:schemeClr val="tx1"/>
+                </a:solidFill>
+                <a:latin typeface="+mn-lt"/>
+                <a:ea typeface="+mn-ea"/>
+                <a:cs typeface="+mn-cs"/>
+              </a:defRPr>
+            </a:lvl5pPr>
+            <a:lvl6pPr marL="2514600" indent="-228600" algn="l" defTabSz="914400" rtl="0" eaLnBrk="1" latinLnBrk="0" hangingPunct="1">
+              <a:lnSpc>
+                <a:spcPct val="90000"/>
+              </a:lnSpc>
+              <a:spcBef>
+                <a:spcPts val="500"/>
+              </a:spcBef>
+              <a:buFont typeface="Arial" panose="020B0604020202020204" pitchFamily="34" charset="0"/>
+              <a:buChar char="•"/>
+              <a:defRPr sz="1800" kern="1200">
+                <a:solidFill>
+                  <a:schemeClr val="tx1"/>
+                </a:solidFill>
+                <a:latin typeface="+mn-lt"/>
+                <a:ea typeface="+mn-ea"/>
+                <a:cs typeface="+mn-cs"/>
+              </a:defRPr>
+            </a:lvl6pPr>
+            <a:lvl7pPr marL="2971800" indent="-228600" algn="l" defTabSz="914400" rtl="0" eaLnBrk="1" latinLnBrk="0" hangingPunct="1">
+              <a:lnSpc>
+                <a:spcPct val="90000"/>
+              </a:lnSpc>
+              <a:spcBef>
+                <a:spcPts val="500"/>
+              </a:spcBef>
+              <a:buFont typeface="Arial" panose="020B0604020202020204" pitchFamily="34" charset="0"/>
+              <a:buChar char="•"/>
+              <a:defRPr sz="1800" kern="1200">
+                <a:solidFill>
+                  <a:schemeClr val="tx1"/>
+                </a:solidFill>
+                <a:latin typeface="+mn-lt"/>
+                <a:ea typeface="+mn-ea"/>
+                <a:cs typeface="+mn-cs"/>
+              </a:defRPr>
+            </a:lvl7pPr>
+            <a:lvl8pPr marL="3429000" indent="-228600" algn="l" defTabSz="914400" rtl="0" eaLnBrk="1" latinLnBrk="0" hangingPunct="1">
+              <a:lnSpc>
+                <a:spcPct val="90000"/>
+              </a:lnSpc>
+              <a:spcBef>
+                <a:spcPts val="500"/>
+              </a:spcBef>
+              <a:buFont typeface="Arial" panose="020B0604020202020204" pitchFamily="34" charset="0"/>
+              <a:buChar char="•"/>
+              <a:defRPr sz="1800" kern="1200">
+                <a:solidFill>
+                  <a:schemeClr val="tx1"/>
+                </a:solidFill>
+                <a:latin typeface="+mn-lt"/>
+                <a:ea typeface="+mn-ea"/>
+                <a:cs typeface="+mn-cs"/>
+              </a:defRPr>
+            </a:lvl8pPr>
+            <a:lvl9pPr marL="3886200" indent="-228600" algn="l" defTabSz="914400" rtl="0" eaLnBrk="1" latinLnBrk="0" hangingPunct="1">
+              <a:lnSpc>
+                <a:spcPct val="90000"/>
+              </a:lnSpc>
+              <a:spcBef>
+                <a:spcPts val="500"/>
+              </a:spcBef>
+              <a:buFont typeface="Arial" panose="020B0604020202020204" pitchFamily="34" charset="0"/>
+              <a:buChar char="•"/>
+              <a:defRPr sz="1800" kern="1200">
+                <a:solidFill>
+                  <a:schemeClr val="tx1"/>
+                </a:solidFill>
+                <a:latin typeface="+mn-lt"/>
+                <a:ea typeface="+mn-ea"/>
+                <a:cs typeface="+mn-cs"/>
+              </a:defRPr>
+            </a:lvl9pPr>
+          </a:lstStyle>
+          <a:p>
+            <a:pPr lvl="1">
+              <a:lnSpc>
+                <a:spcPct val="100000"/>
+              </a:lnSpc>
+            </a:pPr>
+            <a:r>
+              <a:rPr lang="en-US" sz="2000" dirty="0"/>
+              <a:t>4 capture points used with 6 cumulative CAF calculations</a:t>
+            </a:r>
+          </a:p>
+          <a:p>
+            <a:pPr lvl="1">
+              <a:lnSpc>
+                <a:spcPct val="100000"/>
+              </a:lnSpc>
+            </a:pPr>
+            <a:r>
+              <a:rPr lang="en-US" sz="2000" dirty="0"/>
+              <a:t>Wider BW is known to be easier to geolocate and correlation peaks are sharper from CAF. </a:t>
+            </a:r>
+          </a:p>
+          <a:p>
+            <a:pPr lvl="1">
+              <a:lnSpc>
+                <a:spcPct val="100000"/>
+              </a:lnSpc>
+            </a:pPr>
+            <a:r>
+              <a:rPr lang="en-US" sz="2000" dirty="0" err="1"/>
+              <a:t>TDoA</a:t>
+            </a:r>
+            <a:r>
+              <a:rPr lang="en-US" sz="2000" dirty="0"/>
+              <a:t> precision from wide BW </a:t>
+            </a:r>
+          </a:p>
+          <a:p>
+            <a:pPr lvl="1">
+              <a:lnSpc>
+                <a:spcPct val="100000"/>
+              </a:lnSpc>
+            </a:pPr>
+            <a:r>
+              <a:rPr lang="en-US" sz="2000" dirty="0" err="1"/>
+              <a:t>FDoA</a:t>
+            </a:r>
+            <a:endParaRPr lang="en-US" sz="2000" dirty="0"/>
+          </a:p>
+          <a:p>
+            <a:pPr lvl="1">
+              <a:lnSpc>
+                <a:spcPct val="100000"/>
+              </a:lnSpc>
+            </a:pPr>
+            <a:r>
+              <a:rPr lang="en-US" sz="2000" dirty="0"/>
+              <a:t>Multipath would make narrow band more blurred?</a:t>
+            </a:r>
+          </a:p>
+          <a:p>
+            <a:pPr lvl="1">
+              <a:lnSpc>
+                <a:spcPct val="100000"/>
+              </a:lnSpc>
+            </a:pPr>
+            <a:r>
+              <a:rPr lang="en-US" sz="2000" dirty="0"/>
+              <a:t>Doppler would decrease </a:t>
+            </a:r>
+            <a:r>
+              <a:rPr lang="en-US" sz="2000" dirty="0" err="1"/>
+              <a:t>Fdoa</a:t>
+            </a:r>
+            <a:r>
+              <a:rPr lang="en-US" sz="2000" dirty="0"/>
+              <a:t> </a:t>
+            </a:r>
+            <a:r>
+              <a:rPr lang="en-US" sz="2000" dirty="0" err="1"/>
+              <a:t>presicion</a:t>
+            </a:r>
+            <a:endParaRPr lang="en-US" sz="2000" dirty="0"/>
+          </a:p>
+          <a:p>
+            <a:pPr lvl="1">
+              <a:lnSpc>
+                <a:spcPct val="100000"/>
+              </a:lnSpc>
+            </a:pPr>
+            <a:r>
+              <a:rPr lang="en-US" sz="2000" dirty="0"/>
+              <a:t>LoRa has enough range of BW choices to have varying effect?</a:t>
+            </a:r>
+          </a:p>
+          <a:p>
+            <a:pPr lvl="1">
+              <a:lnSpc>
+                <a:spcPct val="100000"/>
+              </a:lnSpc>
+            </a:pPr>
+            <a:r>
+              <a:rPr lang="en-US" sz="2000" dirty="0">
+                <a:highlight>
+                  <a:srgbClr val="FF0000"/>
+                </a:highlight>
+              </a:rPr>
+              <a:t>Need to calculate area of peaks for comparison analysis</a:t>
+            </a:r>
+            <a:endParaRPr lang="en-US" sz="1600" dirty="0">
+              <a:highlight>
+                <a:srgbClr val="FF0000"/>
+              </a:highlight>
+            </a:endParaRPr>
+          </a:p>
+          <a:p>
+            <a:pPr lvl="1">
+              <a:lnSpc>
+                <a:spcPct val="100000"/>
+              </a:lnSpc>
+            </a:pPr>
+            <a:endParaRPr lang="en-US" sz="1800" dirty="0">
+              <a:solidFill>
+                <a:schemeClr val="bg1"/>
+              </a:solidFill>
+            </a:endParaRPr>
+          </a:p>
+          <a:p>
+            <a:pPr marL="457200" lvl="1" indent="0">
+              <a:buFont typeface="Arial" panose="020B0604020202020204" pitchFamily="34" charset="0"/>
+              <a:buNone/>
+            </a:pPr>
+            <a:endParaRPr lang="en-US" sz="2000" dirty="0">
+              <a:solidFill>
+                <a:schemeClr val="bg1"/>
+              </a:solidFill>
+            </a:endParaRPr>
+          </a:p>
+        </p:txBody>
+      </p:sp>
+    </p:spTree>
+    <p:extLst>
+      <p:ext uri="{BB962C8B-B14F-4D97-AF65-F5344CB8AC3E}">
+        <p14:creationId xmlns:p14="http://schemas.microsoft.com/office/powerpoint/2010/main" val="923147835"/>
+      </p:ext>
+    </p:extLst>
+  </p:cSld>
+  <p:clrMapOvr>
+    <a:masterClrMapping/>
+  </p:clrMapOvr>
+</p:sld>
+</file>
+
+<file path=ppt/slides/slide5.xml><?xml version="1.0" encoding="utf-8"?>
+<p:sld xmlns:a="http://schemas.openxmlformats.org/drawingml/2006/main" xmlns:r="http://schemas.openxmlformats.org/officeDocument/2006/relationships" xmlns:p="http://schemas.openxmlformats.org/presentationml/2006/main">
+  <p:cSld>
+    <p:spTree>
+      <p:nvGrpSpPr>
+        <p:cNvPr id="1" name=""/>
+        <p:cNvGrpSpPr/>
+        <p:nvPr/>
+      </p:nvGrpSpPr>
+      <p:grpSpPr>
+        <a:xfrm>
+          <a:off x="0" y="0"/>
+          <a:ext cx="0" cy="0"/>
+          <a:chOff x="0" y="0"/>
+          <a:chExt cx="0" cy="0"/>
+        </a:xfrm>
+      </p:grpSpPr>
+      <p:sp>
+        <p:nvSpPr>
+          <p:cNvPr id="5" name="Oval 4">
+            <a:extLst>
+              <a:ext uri="{FF2B5EF4-FFF2-40B4-BE49-F238E27FC236}">
+                <a16:creationId xmlns:a16="http://schemas.microsoft.com/office/drawing/2014/main" id="{6B94FE91-635C-5898-CBF5-891882BCA38A}"/>
+              </a:ext>
+            </a:extLst>
+          </p:cNvPr>
+          <p:cNvSpPr/>
+          <p:nvPr/>
+        </p:nvSpPr>
+        <p:spPr>
+          <a:xfrm>
+            <a:off x="3314700" y="2575560"/>
+            <a:ext cx="175260" cy="167640"/>
+          </a:xfrm>
+          <a:prstGeom prst="ellipse">
+            <a:avLst/>
+          </a:prstGeom>
+          <a:solidFill>
+            <a:srgbClr val="FF0000"/>
+          </a:solidFill>
+        </p:spPr>
+        <p:style>
+          <a:lnRef idx="2">
+            <a:schemeClr val="accent1">
+              <a:shade val="15000"/>
+            </a:schemeClr>
+          </a:lnRef>
+          <a:fillRef idx="1">
+            <a:schemeClr val="accent1"/>
+          </a:fillRef>
+          <a:effectRef idx="0">
+            <a:schemeClr val="accent1"/>
+          </a:effectRef>
+          <a:fontRef idx="minor">
+            <a:schemeClr val="lt1"/>
+          </a:fontRef>
+        </p:style>
+        <p:txBody>
+          <a:bodyPr rtlCol="0" anchor="ctr"/>
+          <a:lstStyle/>
+          <a:p>
+            <a:pPr algn="ctr"/>
+            <a:endParaRPr lang="en-US"/>
+          </a:p>
+        </p:txBody>
+      </p:sp>
+      <p:sp>
+        <p:nvSpPr>
+          <p:cNvPr id="6" name="Oval 5">
+            <a:extLst>
+              <a:ext uri="{FF2B5EF4-FFF2-40B4-BE49-F238E27FC236}">
+                <a16:creationId xmlns:a16="http://schemas.microsoft.com/office/drawing/2014/main" id="{A7D777ED-1462-8679-F683-59BF73C805E0}"/>
+              </a:ext>
+            </a:extLst>
+          </p:cNvPr>
+          <p:cNvSpPr/>
+          <p:nvPr/>
+        </p:nvSpPr>
+        <p:spPr>
+          <a:xfrm>
+            <a:off x="3314700" y="1661160"/>
+            <a:ext cx="175260" cy="167640"/>
+          </a:xfrm>
+          <a:prstGeom prst="ellipse">
+            <a:avLst/>
+          </a:prstGeom>
+          <a:solidFill>
+            <a:srgbClr val="FF0000"/>
+          </a:solidFill>
+        </p:spPr>
+        <p:style>
+          <a:lnRef idx="2">
+            <a:schemeClr val="accent1">
+              <a:shade val="15000"/>
+            </a:schemeClr>
+          </a:lnRef>
+          <a:fillRef idx="1">
+            <a:schemeClr val="accent1"/>
+          </a:fillRef>
+          <a:effectRef idx="0">
+            <a:schemeClr val="accent1"/>
+          </a:effectRef>
+          <a:fontRef idx="minor">
+            <a:schemeClr val="lt1"/>
+          </a:fontRef>
+        </p:style>
+        <p:txBody>
+          <a:bodyPr rtlCol="0" anchor="ctr"/>
+          <a:lstStyle/>
+          <a:p>
+            <a:pPr algn="ctr"/>
+            <a:endParaRPr lang="en-US"/>
+          </a:p>
+        </p:txBody>
+      </p:sp>
+      <p:sp>
+        <p:nvSpPr>
+          <p:cNvPr id="7" name="Oval 6">
+            <a:extLst>
+              <a:ext uri="{FF2B5EF4-FFF2-40B4-BE49-F238E27FC236}">
+                <a16:creationId xmlns:a16="http://schemas.microsoft.com/office/drawing/2014/main" id="{66FA9C24-C4F2-4111-5FC4-7148781058BA}"/>
+              </a:ext>
+            </a:extLst>
+          </p:cNvPr>
+          <p:cNvSpPr/>
+          <p:nvPr/>
+        </p:nvSpPr>
+        <p:spPr>
+          <a:xfrm>
+            <a:off x="3314700" y="4404360"/>
+            <a:ext cx="175260" cy="167640"/>
+          </a:xfrm>
+          <a:prstGeom prst="ellipse">
+            <a:avLst/>
+          </a:prstGeom>
+          <a:solidFill>
+            <a:srgbClr val="FF0000"/>
+          </a:solidFill>
+        </p:spPr>
+        <p:style>
+          <a:lnRef idx="2">
+            <a:schemeClr val="accent1">
+              <a:shade val="15000"/>
+            </a:schemeClr>
+          </a:lnRef>
+          <a:fillRef idx="1">
+            <a:schemeClr val="accent1"/>
+          </a:fillRef>
+          <a:effectRef idx="0">
+            <a:schemeClr val="accent1"/>
+          </a:effectRef>
+          <a:fontRef idx="minor">
+            <a:schemeClr val="lt1"/>
+          </a:fontRef>
+        </p:style>
+        <p:txBody>
+          <a:bodyPr rtlCol="0" anchor="ctr"/>
+          <a:lstStyle/>
+          <a:p>
+            <a:pPr algn="ctr"/>
+            <a:endParaRPr lang="en-US"/>
+          </a:p>
+        </p:txBody>
+      </p:sp>
+      <p:sp>
+        <p:nvSpPr>
+          <p:cNvPr id="8" name="Oval 7">
+            <a:extLst>
+              <a:ext uri="{FF2B5EF4-FFF2-40B4-BE49-F238E27FC236}">
+                <a16:creationId xmlns:a16="http://schemas.microsoft.com/office/drawing/2014/main" id="{4C18CEF7-CF12-564D-9512-50524D6F2C8E}"/>
+              </a:ext>
+            </a:extLst>
+          </p:cNvPr>
+          <p:cNvSpPr/>
+          <p:nvPr/>
+        </p:nvSpPr>
+        <p:spPr>
+          <a:xfrm>
+            <a:off x="3314700" y="5318760"/>
+            <a:ext cx="175260" cy="167640"/>
+          </a:xfrm>
+          <a:prstGeom prst="ellipse">
+            <a:avLst/>
+          </a:prstGeom>
+          <a:solidFill>
+            <a:srgbClr val="FF0000"/>
+          </a:solidFill>
+        </p:spPr>
+        <p:style>
+          <a:lnRef idx="2">
+            <a:schemeClr val="accent1">
+              <a:shade val="15000"/>
+            </a:schemeClr>
+          </a:lnRef>
+          <a:fillRef idx="1">
+            <a:schemeClr val="accent1"/>
+          </a:fillRef>
+          <a:effectRef idx="0">
+            <a:schemeClr val="accent1"/>
+          </a:effectRef>
+          <a:fontRef idx="minor">
+            <a:schemeClr val="lt1"/>
+          </a:fontRef>
+        </p:style>
+        <p:txBody>
+          <a:bodyPr rtlCol="0" anchor="ctr"/>
+          <a:lstStyle/>
+          <a:p>
+            <a:pPr algn="ctr"/>
+            <a:endParaRPr lang="en-US"/>
+          </a:p>
+        </p:txBody>
+      </p:sp>
+      <p:sp>
+        <p:nvSpPr>
+          <p:cNvPr id="9" name="Oval 8">
+            <a:extLst>
+              <a:ext uri="{FF2B5EF4-FFF2-40B4-BE49-F238E27FC236}">
+                <a16:creationId xmlns:a16="http://schemas.microsoft.com/office/drawing/2014/main" id="{19201A09-3D90-22E4-B801-23DFA89B897B}"/>
+              </a:ext>
+            </a:extLst>
+          </p:cNvPr>
+          <p:cNvSpPr/>
+          <p:nvPr/>
+        </p:nvSpPr>
+        <p:spPr>
+          <a:xfrm>
+            <a:off x="2335530" y="3489960"/>
+            <a:ext cx="175260" cy="167640"/>
+          </a:xfrm>
+          <a:prstGeom prst="ellipse">
+            <a:avLst/>
+          </a:prstGeom>
+          <a:solidFill>
+            <a:schemeClr val="accent6"/>
+          </a:solidFill>
+        </p:spPr>
+        <p:style>
+          <a:lnRef idx="2">
+            <a:schemeClr val="accent1">
+              <a:shade val="15000"/>
+            </a:schemeClr>
+          </a:lnRef>
+          <a:fillRef idx="1">
+            <a:schemeClr val="accent1"/>
+          </a:fillRef>
+          <a:effectRef idx="0">
+            <a:schemeClr val="accent1"/>
+          </a:effectRef>
+          <a:fontRef idx="minor">
+            <a:schemeClr val="lt1"/>
+          </a:fontRef>
+        </p:style>
+        <p:txBody>
+          <a:bodyPr rtlCol="0" anchor="ctr"/>
+          <a:lstStyle/>
+          <a:p>
+            <a:pPr algn="ctr"/>
+            <a:endParaRPr lang="en-US"/>
+          </a:p>
+        </p:txBody>
+      </p:sp>
+      <p:sp>
+        <p:nvSpPr>
+          <p:cNvPr id="10" name="Oval 9">
+            <a:extLst>
+              <a:ext uri="{FF2B5EF4-FFF2-40B4-BE49-F238E27FC236}">
+                <a16:creationId xmlns:a16="http://schemas.microsoft.com/office/drawing/2014/main" id="{696DAD87-76D3-EA9F-BBB9-5EAE467BC555}"/>
+              </a:ext>
+            </a:extLst>
+          </p:cNvPr>
+          <p:cNvSpPr/>
+          <p:nvPr/>
+        </p:nvSpPr>
+        <p:spPr>
+          <a:xfrm>
+            <a:off x="1356360" y="3489960"/>
+            <a:ext cx="175260" cy="167640"/>
+          </a:xfrm>
+          <a:prstGeom prst="ellipse">
+            <a:avLst/>
+          </a:prstGeom>
+          <a:solidFill>
+            <a:schemeClr val="accent6"/>
+          </a:solidFill>
+        </p:spPr>
+        <p:style>
+          <a:lnRef idx="2">
+            <a:schemeClr val="accent1">
+              <a:shade val="15000"/>
+            </a:schemeClr>
+          </a:lnRef>
+          <a:fillRef idx="1">
+            <a:schemeClr val="accent1"/>
+          </a:fillRef>
+          <a:effectRef idx="0">
+            <a:schemeClr val="accent1"/>
+          </a:effectRef>
+          <a:fontRef idx="minor">
+            <a:schemeClr val="lt1"/>
+          </a:fontRef>
+        </p:style>
+        <p:txBody>
+          <a:bodyPr rtlCol="0" anchor="ctr"/>
+          <a:lstStyle/>
+          <a:p>
+            <a:pPr algn="ctr"/>
+            <a:endParaRPr lang="en-US"/>
+          </a:p>
+        </p:txBody>
+      </p:sp>
+      <p:cxnSp>
+        <p:nvCxnSpPr>
+          <p:cNvPr id="12" name="Straight Arrow Connector 11">
+            <a:extLst>
+              <a:ext uri="{FF2B5EF4-FFF2-40B4-BE49-F238E27FC236}">
+                <a16:creationId xmlns:a16="http://schemas.microsoft.com/office/drawing/2014/main" id="{99B2B79F-0635-656B-DB5F-F978E2878875}"/>
+              </a:ext>
+            </a:extLst>
+          </p:cNvPr>
+          <p:cNvCxnSpPr>
+            <a:stCxn id="5" idx="4"/>
+            <a:endCxn id="7" idx="0"/>
+          </p:cNvCxnSpPr>
+          <p:nvPr/>
+        </p:nvCxnSpPr>
+        <p:spPr>
+          <a:xfrm>
+            <a:off x="3402330" y="2743200"/>
+            <a:ext cx="0" cy="1661160"/>
+          </a:xfrm>
+          <a:prstGeom prst="straightConnector1">
+            <a:avLst/>
+          </a:prstGeom>
+          <a:ln>
+            <a:headEnd type="triangle"/>
+            <a:tailEnd type="triangle"/>
+          </a:ln>
+        </p:spPr>
+        <p:style>
+          <a:lnRef idx="2">
+            <a:schemeClr val="accent1"/>
+          </a:lnRef>
+          <a:fillRef idx="0">
+            <a:schemeClr val="accent1"/>
+          </a:fillRef>
+          <a:effectRef idx="1">
+            <a:schemeClr val="accent1"/>
+          </a:effectRef>
+          <a:fontRef idx="minor">
+            <a:schemeClr val="tx1"/>
+          </a:fontRef>
+        </p:style>
+      </p:cxnSp>
+      <p:cxnSp>
+        <p:nvCxnSpPr>
+          <p:cNvPr id="14" name="Straight Arrow Connector 13">
+            <a:extLst>
+              <a:ext uri="{FF2B5EF4-FFF2-40B4-BE49-F238E27FC236}">
+                <a16:creationId xmlns:a16="http://schemas.microsoft.com/office/drawing/2014/main" id="{B298DFB0-5348-7F64-AF7F-51EBB40C6C16}"/>
+              </a:ext>
+            </a:extLst>
+          </p:cNvPr>
+          <p:cNvCxnSpPr>
+            <a:stCxn id="5" idx="0"/>
+            <a:endCxn id="6" idx="4"/>
+          </p:cNvCxnSpPr>
+          <p:nvPr/>
+        </p:nvCxnSpPr>
+        <p:spPr>
+          <a:xfrm flipV="1">
+            <a:off x="3402330" y="1828800"/>
+            <a:ext cx="0" cy="746760"/>
+          </a:xfrm>
+          <a:prstGeom prst="straightConnector1">
+            <a:avLst/>
+          </a:prstGeom>
+          <a:ln>
+            <a:headEnd type="triangle"/>
+            <a:tailEnd type="triangle"/>
+          </a:ln>
+        </p:spPr>
+        <p:style>
+          <a:lnRef idx="2">
+            <a:schemeClr val="accent1"/>
+          </a:lnRef>
+          <a:fillRef idx="0">
+            <a:schemeClr val="accent1"/>
+          </a:fillRef>
+          <a:effectRef idx="1">
+            <a:schemeClr val="accent1"/>
+          </a:effectRef>
+          <a:fontRef idx="minor">
+            <a:schemeClr val="tx1"/>
+          </a:fontRef>
+        </p:style>
+      </p:cxnSp>
+      <p:cxnSp>
+        <p:nvCxnSpPr>
+          <p:cNvPr id="16" name="Straight Arrow Connector 15">
+            <a:extLst>
+              <a:ext uri="{FF2B5EF4-FFF2-40B4-BE49-F238E27FC236}">
+                <a16:creationId xmlns:a16="http://schemas.microsoft.com/office/drawing/2014/main" id="{830011AD-E4EF-7888-C915-DE7581285862}"/>
+              </a:ext>
+            </a:extLst>
+          </p:cNvPr>
+          <p:cNvCxnSpPr>
+            <a:stCxn id="7" idx="4"/>
+            <a:endCxn id="8" idx="0"/>
+          </p:cNvCxnSpPr>
+          <p:nvPr/>
+        </p:nvCxnSpPr>
+        <p:spPr>
+          <a:xfrm>
+            <a:off x="3402330" y="4572000"/>
+            <a:ext cx="0" cy="746760"/>
+          </a:xfrm>
+          <a:prstGeom prst="straightConnector1">
+            <a:avLst/>
+          </a:prstGeom>
+          <a:ln>
+            <a:headEnd type="triangle"/>
+            <a:tailEnd type="triangle"/>
+          </a:ln>
+        </p:spPr>
+        <p:style>
+          <a:lnRef idx="2">
+            <a:schemeClr val="accent1"/>
+          </a:lnRef>
+          <a:fillRef idx="0">
+            <a:schemeClr val="accent1"/>
+          </a:fillRef>
+          <a:effectRef idx="1">
+            <a:schemeClr val="accent1"/>
+          </a:effectRef>
+          <a:fontRef idx="minor">
+            <a:schemeClr val="tx1"/>
+          </a:fontRef>
+        </p:style>
+      </p:cxnSp>
+      <p:cxnSp>
+        <p:nvCxnSpPr>
+          <p:cNvPr id="18" name="Straight Arrow Connector 17">
+            <a:extLst>
+              <a:ext uri="{FF2B5EF4-FFF2-40B4-BE49-F238E27FC236}">
+                <a16:creationId xmlns:a16="http://schemas.microsoft.com/office/drawing/2014/main" id="{D6C66ACC-A3D0-3BA7-F2EB-9E71EFBC1B9B}"/>
+              </a:ext>
+            </a:extLst>
+          </p:cNvPr>
+          <p:cNvCxnSpPr>
+            <a:stCxn id="10" idx="6"/>
+            <a:endCxn id="9" idx="2"/>
+          </p:cNvCxnSpPr>
+          <p:nvPr/>
+        </p:nvCxnSpPr>
+        <p:spPr>
+          <a:xfrm>
+            <a:off x="1531620" y="3573780"/>
+            <a:ext cx="803910" cy="0"/>
+          </a:xfrm>
+          <a:prstGeom prst="straightConnector1">
+            <a:avLst/>
+          </a:prstGeom>
+          <a:ln>
+            <a:headEnd type="triangle"/>
+            <a:tailEnd type="triangle"/>
+          </a:ln>
+        </p:spPr>
+        <p:style>
+          <a:lnRef idx="2">
+            <a:schemeClr val="accent1"/>
+          </a:lnRef>
+          <a:fillRef idx="0">
+            <a:schemeClr val="accent1"/>
+          </a:fillRef>
+          <a:effectRef idx="1">
+            <a:schemeClr val="accent1"/>
+          </a:effectRef>
+          <a:fontRef idx="minor">
+            <a:schemeClr val="tx1"/>
+          </a:fontRef>
+        </p:style>
+      </p:cxnSp>
+      <p:cxnSp>
+        <p:nvCxnSpPr>
+          <p:cNvPr id="20" name="Straight Arrow Connector 19">
+            <a:extLst>
+              <a:ext uri="{FF2B5EF4-FFF2-40B4-BE49-F238E27FC236}">
+                <a16:creationId xmlns:a16="http://schemas.microsoft.com/office/drawing/2014/main" id="{B24FD8E6-27E8-2A7E-1D61-7617CA28F028}"/>
+              </a:ext>
+            </a:extLst>
+          </p:cNvPr>
+          <p:cNvCxnSpPr>
+            <a:stCxn id="9" idx="6"/>
+          </p:cNvCxnSpPr>
+          <p:nvPr/>
+        </p:nvCxnSpPr>
+        <p:spPr>
+          <a:xfrm>
+            <a:off x="2510790" y="3573780"/>
+            <a:ext cx="891540" cy="0"/>
+          </a:xfrm>
+          <a:prstGeom prst="straightConnector1">
+            <a:avLst/>
+          </a:prstGeom>
+          <a:ln>
+            <a:headEnd type="triangle"/>
+            <a:tailEnd type="triangle"/>
+          </a:ln>
+        </p:spPr>
+        <p:style>
+          <a:lnRef idx="2">
+            <a:schemeClr val="accent1"/>
+          </a:lnRef>
+          <a:fillRef idx="0">
+            <a:schemeClr val="accent1"/>
+          </a:fillRef>
+          <a:effectRef idx="1">
+            <a:schemeClr val="accent1"/>
+          </a:effectRef>
+          <a:fontRef idx="minor">
+            <a:schemeClr val="tx1"/>
+          </a:fontRef>
+        </p:style>
+      </p:cxnSp>
+      <p:sp>
+        <p:nvSpPr>
+          <p:cNvPr id="22" name="TextBox 21">
+            <a:extLst>
+              <a:ext uri="{FF2B5EF4-FFF2-40B4-BE49-F238E27FC236}">
+                <a16:creationId xmlns:a16="http://schemas.microsoft.com/office/drawing/2014/main" id="{0B5CBAF3-8C74-C510-AFAF-3273D8DB861F}"/>
+              </a:ext>
+            </a:extLst>
+          </p:cNvPr>
+          <p:cNvSpPr txBox="1"/>
+          <p:nvPr/>
+        </p:nvSpPr>
+        <p:spPr>
+          <a:xfrm>
+            <a:off x="3489960" y="2059424"/>
+            <a:ext cx="755335" cy="369332"/>
+          </a:xfrm>
+          <a:prstGeom prst="rect">
+            <a:avLst/>
+          </a:prstGeom>
+          <a:noFill/>
+        </p:spPr>
+        <p:txBody>
+          <a:bodyPr wrap="none" rtlCol="0">
+            <a:spAutoFit/>
+          </a:bodyPr>
+          <a:lstStyle/>
+          <a:p>
+            <a:r>
+              <a:rPr lang="en-US" dirty="0"/>
+              <a:t>10nm</a:t>
+            </a:r>
+          </a:p>
+        </p:txBody>
+      </p:sp>
+      <p:sp>
+        <p:nvSpPr>
+          <p:cNvPr id="23" name="TextBox 22">
+            <a:extLst>
+              <a:ext uri="{FF2B5EF4-FFF2-40B4-BE49-F238E27FC236}">
+                <a16:creationId xmlns:a16="http://schemas.microsoft.com/office/drawing/2014/main" id="{5DCD9F9D-925B-1C84-215A-19893C0A630C}"/>
+              </a:ext>
+            </a:extLst>
+          </p:cNvPr>
+          <p:cNvSpPr txBox="1"/>
+          <p:nvPr/>
+        </p:nvSpPr>
+        <p:spPr>
+          <a:xfrm>
+            <a:off x="3402330" y="4715231"/>
+            <a:ext cx="755335" cy="369332"/>
+          </a:xfrm>
+          <a:prstGeom prst="rect">
+            <a:avLst/>
+          </a:prstGeom>
+          <a:noFill/>
+        </p:spPr>
+        <p:txBody>
+          <a:bodyPr wrap="none" rtlCol="0">
+            <a:spAutoFit/>
+          </a:bodyPr>
+          <a:lstStyle/>
+          <a:p>
+            <a:r>
+              <a:rPr lang="en-US" dirty="0"/>
+              <a:t>10nm</a:t>
+            </a:r>
+          </a:p>
+        </p:txBody>
+      </p:sp>
+      <p:sp>
+        <p:nvSpPr>
+          <p:cNvPr id="24" name="TextBox 23">
+            <a:extLst>
+              <a:ext uri="{FF2B5EF4-FFF2-40B4-BE49-F238E27FC236}">
+                <a16:creationId xmlns:a16="http://schemas.microsoft.com/office/drawing/2014/main" id="{E5E56EDE-1B02-55AC-B6E4-DFFC23E8D04A}"/>
+              </a:ext>
+            </a:extLst>
+          </p:cNvPr>
+          <p:cNvSpPr txBox="1"/>
+          <p:nvPr/>
+        </p:nvSpPr>
+        <p:spPr>
+          <a:xfrm>
+            <a:off x="2578892" y="3619738"/>
+            <a:ext cx="755335" cy="369332"/>
+          </a:xfrm>
+          <a:prstGeom prst="rect">
+            <a:avLst/>
+          </a:prstGeom>
+          <a:noFill/>
+        </p:spPr>
+        <p:txBody>
+          <a:bodyPr wrap="none" rtlCol="0">
+            <a:spAutoFit/>
+          </a:bodyPr>
+          <a:lstStyle/>
+          <a:p>
+            <a:r>
+              <a:rPr lang="en-US" dirty="0"/>
+              <a:t>10nm</a:t>
+            </a:r>
+          </a:p>
+        </p:txBody>
+      </p:sp>
+      <p:sp>
+        <p:nvSpPr>
+          <p:cNvPr id="25" name="TextBox 24">
+            <a:extLst>
+              <a:ext uri="{FF2B5EF4-FFF2-40B4-BE49-F238E27FC236}">
+                <a16:creationId xmlns:a16="http://schemas.microsoft.com/office/drawing/2014/main" id="{37C62EDB-51A9-06BF-A0F5-43BFD2F9563C}"/>
+              </a:ext>
+            </a:extLst>
+          </p:cNvPr>
+          <p:cNvSpPr txBox="1"/>
+          <p:nvPr/>
+        </p:nvSpPr>
+        <p:spPr>
+          <a:xfrm>
+            <a:off x="1531620" y="3619738"/>
+            <a:ext cx="755335" cy="369332"/>
+          </a:xfrm>
+          <a:prstGeom prst="rect">
+            <a:avLst/>
+          </a:prstGeom>
+          <a:noFill/>
+        </p:spPr>
+        <p:txBody>
+          <a:bodyPr wrap="none" rtlCol="0">
+            <a:spAutoFit/>
+          </a:bodyPr>
+          <a:lstStyle/>
+          <a:p>
+            <a:r>
+              <a:rPr lang="en-US" dirty="0"/>
+              <a:t>10nm</a:t>
+            </a:r>
+          </a:p>
+        </p:txBody>
+      </p:sp>
+      <p:sp>
+        <p:nvSpPr>
+          <p:cNvPr id="26" name="TextBox 25">
+            <a:extLst>
+              <a:ext uri="{FF2B5EF4-FFF2-40B4-BE49-F238E27FC236}">
+                <a16:creationId xmlns:a16="http://schemas.microsoft.com/office/drawing/2014/main" id="{54A5877D-B451-84AF-CFBE-DE1999E8A7AC}"/>
+              </a:ext>
+            </a:extLst>
+          </p:cNvPr>
+          <p:cNvSpPr txBox="1"/>
+          <p:nvPr/>
+        </p:nvSpPr>
+        <p:spPr>
+          <a:xfrm>
+            <a:off x="3402329" y="3074669"/>
+            <a:ext cx="755335" cy="369332"/>
+          </a:xfrm>
+          <a:prstGeom prst="rect">
+            <a:avLst/>
+          </a:prstGeom>
+          <a:noFill/>
+        </p:spPr>
+        <p:txBody>
+          <a:bodyPr wrap="none" rtlCol="0">
+            <a:spAutoFit/>
+          </a:bodyPr>
+          <a:lstStyle/>
+          <a:p>
+            <a:r>
+              <a:rPr lang="en-US" dirty="0"/>
+              <a:t>20nm</a:t>
+            </a:r>
+          </a:p>
+        </p:txBody>
+      </p:sp>
+      <p:sp>
+        <p:nvSpPr>
+          <p:cNvPr id="27" name="TextBox 26">
+            <a:extLst>
+              <a:ext uri="{FF2B5EF4-FFF2-40B4-BE49-F238E27FC236}">
+                <a16:creationId xmlns:a16="http://schemas.microsoft.com/office/drawing/2014/main" id="{6D88E6E0-D4C7-962B-2DB5-0D7451A44302}"/>
+              </a:ext>
+            </a:extLst>
+          </p:cNvPr>
+          <p:cNvSpPr txBox="1"/>
+          <p:nvPr/>
+        </p:nvSpPr>
+        <p:spPr>
+          <a:xfrm>
+            <a:off x="2510790" y="1320760"/>
+            <a:ext cx="601703" cy="369332"/>
+          </a:xfrm>
+          <a:prstGeom prst="rect">
+            <a:avLst/>
+          </a:prstGeom>
+          <a:noFill/>
+        </p:spPr>
+        <p:txBody>
+          <a:bodyPr wrap="none" rtlCol="0">
+            <a:spAutoFit/>
+          </a:bodyPr>
+          <a:lstStyle/>
+          <a:p>
+            <a:r>
+              <a:rPr lang="en-US" dirty="0"/>
+              <a:t>CAF</a:t>
+            </a:r>
+          </a:p>
+        </p:txBody>
+      </p:sp>
+      <p:sp>
+        <p:nvSpPr>
+          <p:cNvPr id="28" name="Oval 27">
+            <a:extLst>
+              <a:ext uri="{FF2B5EF4-FFF2-40B4-BE49-F238E27FC236}">
+                <a16:creationId xmlns:a16="http://schemas.microsoft.com/office/drawing/2014/main" id="{880762F6-DD8E-F19F-F224-9ABF8E091EDD}"/>
+              </a:ext>
+            </a:extLst>
+          </p:cNvPr>
+          <p:cNvSpPr/>
+          <p:nvPr/>
+        </p:nvSpPr>
+        <p:spPr>
+          <a:xfrm>
+            <a:off x="9781661" y="2227439"/>
+            <a:ext cx="175260" cy="167640"/>
+          </a:xfrm>
+          <a:prstGeom prst="ellipse">
+            <a:avLst/>
+          </a:prstGeom>
+          <a:solidFill>
+            <a:schemeClr val="accent6"/>
+          </a:solidFill>
+        </p:spPr>
+        <p:style>
+          <a:lnRef idx="2">
+            <a:schemeClr val="accent1">
+              <a:shade val="15000"/>
+            </a:schemeClr>
+          </a:lnRef>
+          <a:fillRef idx="1">
+            <a:schemeClr val="accent1"/>
+          </a:fillRef>
+          <a:effectRef idx="0">
+            <a:schemeClr val="accent1"/>
+          </a:effectRef>
+          <a:fontRef idx="minor">
+            <a:schemeClr val="lt1"/>
+          </a:fontRef>
+        </p:style>
+        <p:txBody>
+          <a:bodyPr rtlCol="0" anchor="ctr"/>
+          <a:lstStyle/>
+          <a:p>
+            <a:pPr algn="ctr"/>
+            <a:endParaRPr lang="en-US"/>
+          </a:p>
+        </p:txBody>
+      </p:sp>
+      <p:sp>
+        <p:nvSpPr>
+          <p:cNvPr id="29" name="Oval 28">
+            <a:extLst>
+              <a:ext uri="{FF2B5EF4-FFF2-40B4-BE49-F238E27FC236}">
+                <a16:creationId xmlns:a16="http://schemas.microsoft.com/office/drawing/2014/main" id="{610293AB-0BF9-4C14-F4C5-E10DD682DFF6}"/>
+              </a:ext>
+            </a:extLst>
+          </p:cNvPr>
+          <p:cNvSpPr/>
+          <p:nvPr/>
+        </p:nvSpPr>
+        <p:spPr>
+          <a:xfrm>
+            <a:off x="7622421" y="2227439"/>
+            <a:ext cx="175260" cy="167640"/>
+          </a:xfrm>
+          <a:prstGeom prst="ellipse">
+            <a:avLst/>
+          </a:prstGeom>
+          <a:solidFill>
+            <a:schemeClr val="accent6"/>
+          </a:solidFill>
+        </p:spPr>
+        <p:style>
+          <a:lnRef idx="2">
+            <a:schemeClr val="accent1">
+              <a:shade val="15000"/>
+            </a:schemeClr>
+          </a:lnRef>
+          <a:fillRef idx="1">
+            <a:schemeClr val="accent1"/>
+          </a:fillRef>
+          <a:effectRef idx="0">
+            <a:schemeClr val="accent1"/>
+          </a:effectRef>
+          <a:fontRef idx="minor">
+            <a:schemeClr val="lt1"/>
+          </a:fontRef>
+        </p:style>
+        <p:txBody>
+          <a:bodyPr rtlCol="0" anchor="ctr"/>
+          <a:lstStyle/>
+          <a:p>
+            <a:pPr algn="ctr"/>
+            <a:endParaRPr lang="en-US"/>
+          </a:p>
+        </p:txBody>
+      </p:sp>
+      <p:sp>
+        <p:nvSpPr>
+          <p:cNvPr id="30" name="Oval 29">
+            <a:extLst>
+              <a:ext uri="{FF2B5EF4-FFF2-40B4-BE49-F238E27FC236}">
+                <a16:creationId xmlns:a16="http://schemas.microsoft.com/office/drawing/2014/main" id="{45B4202F-6DA2-8DFF-242A-802E7D6124C6}"/>
+              </a:ext>
+            </a:extLst>
+          </p:cNvPr>
+          <p:cNvSpPr/>
+          <p:nvPr/>
+        </p:nvSpPr>
+        <p:spPr>
+          <a:xfrm>
+            <a:off x="11031904" y="2227439"/>
+            <a:ext cx="175260" cy="167640"/>
+          </a:xfrm>
+          <a:prstGeom prst="ellipse">
+            <a:avLst/>
+          </a:prstGeom>
+          <a:solidFill>
+            <a:srgbClr val="FF0000"/>
+          </a:solidFill>
+        </p:spPr>
+        <p:style>
+          <a:lnRef idx="2">
+            <a:schemeClr val="accent1">
+              <a:shade val="15000"/>
+            </a:schemeClr>
+          </a:lnRef>
+          <a:fillRef idx="1">
+            <a:schemeClr val="accent1"/>
+          </a:fillRef>
+          <a:effectRef idx="0">
+            <a:schemeClr val="accent1"/>
+          </a:effectRef>
+          <a:fontRef idx="minor">
+            <a:schemeClr val="lt1"/>
+          </a:fontRef>
+        </p:style>
+        <p:txBody>
+          <a:bodyPr rtlCol="0" anchor="ctr"/>
+          <a:lstStyle/>
+          <a:p>
+            <a:pPr algn="ctr"/>
+            <a:endParaRPr lang="en-US"/>
+          </a:p>
+        </p:txBody>
+      </p:sp>
+      <p:cxnSp>
+        <p:nvCxnSpPr>
+          <p:cNvPr id="32" name="Straight Arrow Connector 31">
+            <a:extLst>
+              <a:ext uri="{FF2B5EF4-FFF2-40B4-BE49-F238E27FC236}">
+                <a16:creationId xmlns:a16="http://schemas.microsoft.com/office/drawing/2014/main" id="{0B99F4E1-59E4-7503-F8DB-91970287B4EA}"/>
+              </a:ext>
+            </a:extLst>
+          </p:cNvPr>
+          <p:cNvCxnSpPr>
+            <a:stCxn id="29" idx="6"/>
+            <a:endCxn id="28" idx="2"/>
+          </p:cNvCxnSpPr>
+          <p:nvPr/>
+        </p:nvCxnSpPr>
+        <p:spPr>
+          <a:xfrm>
+            <a:off x="7797681" y="2311259"/>
+            <a:ext cx="1983980" cy="0"/>
+          </a:xfrm>
+          <a:prstGeom prst="straightConnector1">
+            <a:avLst/>
+          </a:prstGeom>
+          <a:ln>
+            <a:headEnd type="triangle"/>
+            <a:tailEnd type="triangle"/>
+          </a:ln>
+        </p:spPr>
+        <p:style>
+          <a:lnRef idx="2">
+            <a:schemeClr val="accent1"/>
+          </a:lnRef>
+          <a:fillRef idx="0">
+            <a:schemeClr val="accent1"/>
+          </a:fillRef>
+          <a:effectRef idx="1">
+            <a:schemeClr val="accent1"/>
+          </a:effectRef>
+          <a:fontRef idx="minor">
+            <a:schemeClr val="tx1"/>
+          </a:fontRef>
+        </p:style>
+      </p:cxnSp>
+      <p:cxnSp>
+        <p:nvCxnSpPr>
+          <p:cNvPr id="34" name="Straight Arrow Connector 33">
+            <a:extLst>
+              <a:ext uri="{FF2B5EF4-FFF2-40B4-BE49-F238E27FC236}">
+                <a16:creationId xmlns:a16="http://schemas.microsoft.com/office/drawing/2014/main" id="{8FC1D3C1-0F2E-86A8-5D56-988CB91B5135}"/>
+              </a:ext>
+            </a:extLst>
+          </p:cNvPr>
+          <p:cNvCxnSpPr>
+            <a:stCxn id="28" idx="6"/>
+            <a:endCxn id="30" idx="2"/>
+          </p:cNvCxnSpPr>
+          <p:nvPr/>
+        </p:nvCxnSpPr>
+        <p:spPr>
+          <a:xfrm>
+            <a:off x="9956921" y="2311259"/>
+            <a:ext cx="1074983" cy="0"/>
+          </a:xfrm>
+          <a:prstGeom prst="straightConnector1">
+            <a:avLst/>
+          </a:prstGeom>
+          <a:ln>
+            <a:headEnd type="triangle"/>
+            <a:tailEnd type="triangle"/>
+          </a:ln>
+        </p:spPr>
+        <p:style>
+          <a:lnRef idx="2">
+            <a:schemeClr val="accent1"/>
+          </a:lnRef>
+          <a:fillRef idx="0">
+            <a:schemeClr val="accent1"/>
+          </a:fillRef>
+          <a:effectRef idx="1">
+            <a:schemeClr val="accent1"/>
+          </a:effectRef>
+          <a:fontRef idx="minor">
+            <a:schemeClr val="tx1"/>
+          </a:fontRef>
+        </p:style>
+      </p:cxnSp>
+      <p:sp>
+        <p:nvSpPr>
+          <p:cNvPr id="35" name="TextBox 34">
+            <a:extLst>
+              <a:ext uri="{FF2B5EF4-FFF2-40B4-BE49-F238E27FC236}">
+                <a16:creationId xmlns:a16="http://schemas.microsoft.com/office/drawing/2014/main" id="{B9A2DCC1-8778-FDDD-09F9-E5745EF0CD23}"/>
+              </a:ext>
+            </a:extLst>
+          </p:cNvPr>
+          <p:cNvSpPr txBox="1"/>
+          <p:nvPr/>
+        </p:nvSpPr>
+        <p:spPr>
+          <a:xfrm>
+            <a:off x="8412003" y="1877079"/>
+            <a:ext cx="683200" cy="369332"/>
+          </a:xfrm>
+          <a:prstGeom prst="rect">
+            <a:avLst/>
+          </a:prstGeom>
+          <a:noFill/>
+        </p:spPr>
+        <p:txBody>
+          <a:bodyPr wrap="none" rtlCol="0">
+            <a:spAutoFit/>
+          </a:bodyPr>
+          <a:lstStyle/>
+          <a:p>
+            <a:r>
+              <a:rPr lang="en-US" dirty="0"/>
+              <a:t>X nm</a:t>
+            </a:r>
+          </a:p>
+        </p:txBody>
+      </p:sp>
+      <p:sp>
+        <p:nvSpPr>
+          <p:cNvPr id="36" name="TextBox 35">
+            <a:extLst>
+              <a:ext uri="{FF2B5EF4-FFF2-40B4-BE49-F238E27FC236}">
+                <a16:creationId xmlns:a16="http://schemas.microsoft.com/office/drawing/2014/main" id="{CB7168B8-6F08-5FFE-6F26-14865DEB596A}"/>
+              </a:ext>
+            </a:extLst>
+          </p:cNvPr>
+          <p:cNvSpPr txBox="1"/>
+          <p:nvPr/>
+        </p:nvSpPr>
+        <p:spPr>
+          <a:xfrm>
+            <a:off x="10116744" y="1840451"/>
+            <a:ext cx="801823" cy="369332"/>
+          </a:xfrm>
+          <a:prstGeom prst="rect">
+            <a:avLst/>
+          </a:prstGeom>
+          <a:noFill/>
+        </p:spPr>
+        <p:txBody>
+          <a:bodyPr wrap="none" rtlCol="0">
+            <a:spAutoFit/>
+          </a:bodyPr>
+          <a:lstStyle/>
+          <a:p>
+            <a:r>
+              <a:rPr lang="en-US" dirty="0"/>
+              <a:t>60 nm</a:t>
+            </a:r>
+          </a:p>
+        </p:txBody>
+      </p:sp>
+      <p:cxnSp>
+        <p:nvCxnSpPr>
+          <p:cNvPr id="38" name="Straight Arrow Connector 37">
+            <a:extLst>
+              <a:ext uri="{FF2B5EF4-FFF2-40B4-BE49-F238E27FC236}">
+                <a16:creationId xmlns:a16="http://schemas.microsoft.com/office/drawing/2014/main" id="{FD1E9399-127B-EE78-9260-106DAF32CB80}"/>
+              </a:ext>
+            </a:extLst>
+          </p:cNvPr>
+          <p:cNvCxnSpPr/>
+          <p:nvPr/>
+        </p:nvCxnSpPr>
+        <p:spPr>
+          <a:xfrm>
+            <a:off x="9863917" y="2582710"/>
+            <a:ext cx="1250243" cy="0"/>
+          </a:xfrm>
+          <a:prstGeom prst="straightConnector1">
+            <a:avLst/>
+          </a:prstGeom>
+          <a:ln>
+            <a:tailEnd type="triangle"/>
+          </a:ln>
+        </p:spPr>
+        <p:style>
+          <a:lnRef idx="2">
+            <a:schemeClr val="accent1"/>
+          </a:lnRef>
+          <a:fillRef idx="0">
+            <a:schemeClr val="accent1"/>
+          </a:fillRef>
+          <a:effectRef idx="1">
+            <a:schemeClr val="accent1"/>
+          </a:effectRef>
+          <a:fontRef idx="minor">
+            <a:schemeClr val="tx1"/>
+          </a:fontRef>
+        </p:style>
+      </p:cxnSp>
+      <p:sp>
+        <p:nvSpPr>
+          <p:cNvPr id="39" name="TextBox 38">
+            <a:extLst>
+              <a:ext uri="{FF2B5EF4-FFF2-40B4-BE49-F238E27FC236}">
+                <a16:creationId xmlns:a16="http://schemas.microsoft.com/office/drawing/2014/main" id="{E59AAC10-5786-31AC-F3CB-C0A790C7D784}"/>
+              </a:ext>
+            </a:extLst>
+          </p:cNvPr>
+          <p:cNvSpPr txBox="1"/>
+          <p:nvPr/>
+        </p:nvSpPr>
+        <p:spPr>
+          <a:xfrm>
+            <a:off x="7981728" y="3514219"/>
+            <a:ext cx="3950386" cy="2862322"/>
+          </a:xfrm>
+          <a:prstGeom prst="rect">
+            <a:avLst/>
+          </a:prstGeom>
+          <a:noFill/>
+        </p:spPr>
+        <p:txBody>
+          <a:bodyPr wrap="square" rtlCol="0">
+            <a:spAutoFit/>
+          </a:bodyPr>
+          <a:lstStyle/>
+          <a:p>
+            <a:r>
+              <a:rPr lang="en-US" dirty="0"/>
+              <a:t>Transceiver moves forward 60nm @ 2nm increments with and without jammer present at the endpoint. </a:t>
+            </a:r>
+          </a:p>
+          <a:p>
+            <a:r>
+              <a:rPr lang="en-US" dirty="0"/>
+              <a:t>Compares impact of comms with and without jammer to compare breakpoint and falloff deltas</a:t>
+            </a:r>
+          </a:p>
+          <a:p>
+            <a:endParaRPr lang="en-US" dirty="0"/>
+          </a:p>
+          <a:p>
+            <a:r>
+              <a:rPr lang="en-US" dirty="0"/>
+              <a:t>Jammer emulated was commercial (and legally obtained) USRP X104 SDR with 23dBm output power. </a:t>
+            </a:r>
+          </a:p>
+        </p:txBody>
+      </p:sp>
+      <p:sp>
+        <p:nvSpPr>
+          <p:cNvPr id="40" name="TextBox 39">
+            <a:extLst>
+              <a:ext uri="{FF2B5EF4-FFF2-40B4-BE49-F238E27FC236}">
+                <a16:creationId xmlns:a16="http://schemas.microsoft.com/office/drawing/2014/main" id="{95B4B0D1-5711-36B8-2CDB-63A09D063ACD}"/>
+              </a:ext>
+            </a:extLst>
+          </p:cNvPr>
+          <p:cNvSpPr txBox="1"/>
+          <p:nvPr/>
+        </p:nvSpPr>
+        <p:spPr>
+          <a:xfrm>
+            <a:off x="6096000" y="1204849"/>
+            <a:ext cx="5476179" cy="369332"/>
+          </a:xfrm>
+          <a:prstGeom prst="rect">
+            <a:avLst/>
+          </a:prstGeom>
+          <a:noFill/>
+        </p:spPr>
+        <p:txBody>
+          <a:bodyPr wrap="none" rtlCol="0">
+            <a:spAutoFit/>
+          </a:bodyPr>
+          <a:lstStyle/>
+          <a:p>
+            <a:r>
+              <a:rPr lang="en-US" dirty="0"/>
+              <a:t>Range and Jamming (dynamic scripts and movement)</a:t>
+            </a:r>
+          </a:p>
+        </p:txBody>
+      </p:sp>
+      <p:sp>
+        <p:nvSpPr>
+          <p:cNvPr id="41" name="TextBox 40">
+            <a:extLst>
+              <a:ext uri="{FF2B5EF4-FFF2-40B4-BE49-F238E27FC236}">
+                <a16:creationId xmlns:a16="http://schemas.microsoft.com/office/drawing/2014/main" id="{FAFC0FC0-B7BA-42C2-F3E8-B26B79F98064}"/>
+              </a:ext>
+            </a:extLst>
+          </p:cNvPr>
+          <p:cNvSpPr txBox="1"/>
+          <p:nvPr/>
+        </p:nvSpPr>
+        <p:spPr>
+          <a:xfrm>
+            <a:off x="4595927" y="384514"/>
+            <a:ext cx="1745734" cy="369332"/>
+          </a:xfrm>
+          <a:prstGeom prst="rect">
+            <a:avLst/>
+          </a:prstGeom>
+          <a:noFill/>
+        </p:spPr>
+        <p:txBody>
+          <a:bodyPr wrap="none" rtlCol="0">
+            <a:spAutoFit/>
+          </a:bodyPr>
+          <a:lstStyle/>
+          <a:p>
+            <a:r>
+              <a:rPr lang="en-US" dirty="0"/>
+              <a:t>Scenarios Used</a:t>
+            </a:r>
+          </a:p>
+        </p:txBody>
+      </p:sp>
+      <p:sp>
+        <p:nvSpPr>
+          <p:cNvPr id="42" name="TextBox 41">
+            <a:extLst>
+              <a:ext uri="{FF2B5EF4-FFF2-40B4-BE49-F238E27FC236}">
+                <a16:creationId xmlns:a16="http://schemas.microsoft.com/office/drawing/2014/main" id="{F91F1B2F-5A5E-2341-9907-B11271864DEC}"/>
+              </a:ext>
+            </a:extLst>
+          </p:cNvPr>
+          <p:cNvSpPr txBox="1"/>
+          <p:nvPr/>
+        </p:nvSpPr>
+        <p:spPr>
+          <a:xfrm>
+            <a:off x="9781661" y="2580764"/>
+            <a:ext cx="1855764" cy="369332"/>
+          </a:xfrm>
+          <a:prstGeom prst="rect">
+            <a:avLst/>
+          </a:prstGeom>
+          <a:noFill/>
+        </p:spPr>
+        <p:txBody>
+          <a:bodyPr wrap="none" rtlCol="0">
+            <a:spAutoFit/>
+          </a:bodyPr>
+          <a:lstStyle/>
+          <a:p>
+            <a:r>
+              <a:rPr lang="en-US" dirty="0"/>
+              <a:t>2 nm increments</a:t>
+            </a:r>
+          </a:p>
+        </p:txBody>
+      </p:sp>
+      <p:sp>
+        <p:nvSpPr>
+          <p:cNvPr id="43" name="TextBox 42">
+            <a:extLst>
+              <a:ext uri="{FF2B5EF4-FFF2-40B4-BE49-F238E27FC236}">
+                <a16:creationId xmlns:a16="http://schemas.microsoft.com/office/drawing/2014/main" id="{B90BB837-7E54-8439-3A33-0AC8538F5B04}"/>
+              </a:ext>
+            </a:extLst>
+          </p:cNvPr>
+          <p:cNvSpPr txBox="1"/>
+          <p:nvPr/>
+        </p:nvSpPr>
+        <p:spPr>
+          <a:xfrm>
+            <a:off x="5386841" y="2863840"/>
+            <a:ext cx="2323210" cy="3416320"/>
+          </a:xfrm>
+          <a:prstGeom prst="rect">
+            <a:avLst/>
+          </a:prstGeom>
+          <a:noFill/>
+        </p:spPr>
+        <p:txBody>
+          <a:bodyPr wrap="square" rtlCol="0">
+            <a:spAutoFit/>
+          </a:bodyPr>
+          <a:lstStyle/>
+          <a:p>
+            <a:pPr marL="285750" indent="-285750">
+              <a:buFont typeface="Arial" panose="020B0604020202020204" pitchFamily="34" charset="0"/>
+              <a:buChar char="•"/>
+            </a:pPr>
+            <a:r>
+              <a:rPr lang="en-US" dirty="0"/>
+              <a:t>SF 7 10.4k</a:t>
+            </a:r>
+          </a:p>
+          <a:p>
+            <a:pPr marL="742950" lvl="1" indent="-285750">
+              <a:buFont typeface="Arial" panose="020B0604020202020204" pitchFamily="34" charset="0"/>
+              <a:buChar char="•"/>
+            </a:pPr>
+            <a:r>
+              <a:rPr lang="en-US" dirty="0"/>
+              <a:t>X = 400nm</a:t>
+            </a:r>
+          </a:p>
+          <a:p>
+            <a:pPr marL="285750" indent="-285750">
+              <a:buFont typeface="Arial" panose="020B0604020202020204" pitchFamily="34" charset="0"/>
+              <a:buChar char="•"/>
+            </a:pPr>
+            <a:r>
+              <a:rPr lang="en-US" dirty="0"/>
+              <a:t>SF 7 20k</a:t>
+            </a:r>
+          </a:p>
+          <a:p>
+            <a:pPr marL="742950" lvl="1" indent="-285750">
+              <a:buFont typeface="Arial" panose="020B0604020202020204" pitchFamily="34" charset="0"/>
+              <a:buChar char="•"/>
+            </a:pPr>
+            <a:r>
+              <a:rPr lang="en-US" dirty="0"/>
+              <a:t>X = 480nm</a:t>
+            </a:r>
+          </a:p>
+          <a:p>
+            <a:pPr marL="285750" indent="-285750">
+              <a:buFont typeface="Arial" panose="020B0604020202020204" pitchFamily="34" charset="0"/>
+              <a:buChar char="•"/>
+            </a:pPr>
+            <a:r>
+              <a:rPr lang="en-US" dirty="0"/>
+              <a:t>SF 7 125k</a:t>
+            </a:r>
+          </a:p>
+          <a:p>
+            <a:pPr marL="742950" lvl="1" indent="-285750">
+              <a:buFont typeface="Arial" panose="020B0604020202020204" pitchFamily="34" charset="0"/>
+              <a:buChar char="•"/>
+            </a:pPr>
+            <a:r>
+              <a:rPr lang="en-US" dirty="0"/>
+              <a:t>X = 390nm</a:t>
+            </a:r>
+          </a:p>
+          <a:p>
+            <a:pPr marL="285750" indent="-285750">
+              <a:buFont typeface="Arial" panose="020B0604020202020204" pitchFamily="34" charset="0"/>
+              <a:buChar char="•"/>
+            </a:pPr>
+            <a:r>
+              <a:rPr lang="en-US" dirty="0"/>
+              <a:t>SF 7 500k</a:t>
+            </a:r>
+          </a:p>
+          <a:p>
+            <a:pPr marL="742950" lvl="1" indent="-285750">
+              <a:buFont typeface="Arial" panose="020B0604020202020204" pitchFamily="34" charset="0"/>
+              <a:buChar char="•"/>
+            </a:pPr>
+            <a:r>
+              <a:rPr lang="en-US" dirty="0"/>
+              <a:t>X = 160nm</a:t>
+            </a:r>
+          </a:p>
+          <a:p>
+            <a:pPr marL="285750" indent="-285750">
+              <a:buFont typeface="Arial" panose="020B0604020202020204" pitchFamily="34" charset="0"/>
+              <a:buChar char="•"/>
+            </a:pPr>
+            <a:r>
+              <a:rPr lang="en-US" dirty="0"/>
+              <a:t>SF 12 125k</a:t>
+            </a:r>
+          </a:p>
+          <a:p>
+            <a:pPr marL="742950" lvl="1" indent="-285750">
+              <a:buFont typeface="Arial" panose="020B0604020202020204" pitchFamily="34" charset="0"/>
+              <a:buChar char="•"/>
+            </a:pPr>
+            <a:r>
+              <a:rPr lang="en-US" dirty="0"/>
+              <a:t>X = 500nm</a:t>
+            </a:r>
+          </a:p>
+          <a:p>
+            <a:pPr marL="285750" indent="-285750">
+              <a:buFont typeface="Arial" panose="020B0604020202020204" pitchFamily="34" charset="0"/>
+              <a:buChar char="•"/>
+            </a:pPr>
+            <a:r>
+              <a:rPr lang="en-US" dirty="0"/>
+              <a:t>SF 12 500k</a:t>
+            </a:r>
+          </a:p>
+          <a:p>
+            <a:pPr marL="742950" lvl="1" indent="-285750">
+              <a:buFont typeface="Arial" panose="020B0604020202020204" pitchFamily="34" charset="0"/>
+              <a:buChar char="•"/>
+            </a:pPr>
+            <a:r>
+              <a:rPr lang="en-US" dirty="0"/>
+              <a:t>X = 480nm</a:t>
+            </a:r>
+          </a:p>
+        </p:txBody>
+      </p:sp>
+    </p:spTree>
+    <p:extLst>
+      <p:ext uri="{BB962C8B-B14F-4D97-AF65-F5344CB8AC3E}">
+        <p14:creationId xmlns:p14="http://schemas.microsoft.com/office/powerpoint/2010/main" val="4060035326"/>
+      </p:ext>
+    </p:extLst>
+  </p:cSld>
+  <p:clrMapOvr>
+    <a:masterClrMapping/>
+  </p:clrMapOvr>
+</p:sld>
+</file>
+
+<file path=ppt/slides/slide6.xml><?xml version="1.0" encoding="utf-8"?>
+<p:sld xmlns:a="http://schemas.openxmlformats.org/drawingml/2006/main" xmlns:r="http://schemas.openxmlformats.org/officeDocument/2006/relationships" xmlns:p="http://schemas.openxmlformats.org/presentationml/2006/main">
+  <p:cSld>
+    <p:spTree>
+      <p:nvGrpSpPr>
+        <p:cNvPr id="1" name=""/>
+        <p:cNvGrpSpPr/>
+        <p:nvPr/>
+      </p:nvGrpSpPr>
+      <p:grpSpPr>
+        <a:xfrm>
+          <a:off x="0" y="0"/>
+          <a:ext cx="0" cy="0"/>
+          <a:chOff x="0" y="0"/>
+          <a:chExt cx="0" cy="0"/>
+        </a:xfrm>
+      </p:grpSpPr>
+      <p:pic>
+        <p:nvPicPr>
+          <p:cNvPr id="5" name="Picture 4">
+            <a:extLst>
+              <a:ext uri="{FF2B5EF4-FFF2-40B4-BE49-F238E27FC236}">
+                <a16:creationId xmlns:a16="http://schemas.microsoft.com/office/drawing/2014/main" id="{7E2A568F-F982-AA49-45AA-636D476A7D0A}"/>
+              </a:ext>
+            </a:extLst>
+          </p:cNvPr>
+          <p:cNvPicPr>
+            <a:picLocks noChangeAspect="1"/>
+          </p:cNvPicPr>
+          <p:nvPr/>
+        </p:nvPicPr>
+        <p:blipFill>
+          <a:blip r:embed="rId2">
+            <a:extLst>
+              <a:ext uri="{28A0092B-C50C-407E-A947-70E740481C1C}">
+                <a14:useLocalDpi xmlns:a14="http://schemas.microsoft.com/office/drawing/2010/main" val="0"/>
+              </a:ext>
+            </a:extLst>
+          </a:blip>
+          <a:stretch>
+            <a:fillRect/>
+          </a:stretch>
+        </p:blipFill>
+        <p:spPr>
+          <a:xfrm>
+            <a:off x="6471871" y="574296"/>
+            <a:ext cx="2748695" cy="2060736"/>
+          </a:xfrm>
+          <a:prstGeom prst="rect">
+            <a:avLst/>
+          </a:prstGeom>
+        </p:spPr>
+      </p:pic>
+      <p:pic>
+        <p:nvPicPr>
+          <p:cNvPr id="7" name="Picture 6">
+            <a:extLst>
+              <a:ext uri="{FF2B5EF4-FFF2-40B4-BE49-F238E27FC236}">
+                <a16:creationId xmlns:a16="http://schemas.microsoft.com/office/drawing/2014/main" id="{8800DEF1-1BE7-3F8A-B01C-495BF6F3A24A}"/>
+              </a:ext>
+            </a:extLst>
+          </p:cNvPr>
+          <p:cNvPicPr>
+            <a:picLocks noChangeAspect="1"/>
+          </p:cNvPicPr>
+          <p:nvPr/>
+        </p:nvPicPr>
+        <p:blipFill>
+          <a:blip r:embed="rId3">
+            <a:extLst>
+              <a:ext uri="{28A0092B-C50C-407E-A947-70E740481C1C}">
+                <a14:useLocalDpi xmlns:a14="http://schemas.microsoft.com/office/drawing/2010/main" val="0"/>
+              </a:ext>
+            </a:extLst>
+          </a:blip>
+          <a:stretch>
+            <a:fillRect/>
+          </a:stretch>
+        </p:blipFill>
+        <p:spPr>
+          <a:xfrm>
+            <a:off x="9220566" y="574296"/>
+            <a:ext cx="2748695" cy="2060736"/>
+          </a:xfrm>
+          <a:prstGeom prst="rect">
+            <a:avLst/>
+          </a:prstGeom>
+        </p:spPr>
+      </p:pic>
+      <p:pic>
+        <p:nvPicPr>
+          <p:cNvPr id="9" name="Picture 8">
+            <a:extLst>
+              <a:ext uri="{FF2B5EF4-FFF2-40B4-BE49-F238E27FC236}">
+                <a16:creationId xmlns:a16="http://schemas.microsoft.com/office/drawing/2014/main" id="{8973EE32-EDE1-4C44-5AB1-188F8BCDD95D}"/>
+              </a:ext>
+            </a:extLst>
+          </p:cNvPr>
+          <p:cNvPicPr>
+            <a:picLocks noChangeAspect="1"/>
+          </p:cNvPicPr>
+          <p:nvPr/>
+        </p:nvPicPr>
+        <p:blipFill>
+          <a:blip r:embed="rId4">
+            <a:extLst>
+              <a:ext uri="{28A0092B-C50C-407E-A947-70E740481C1C}">
+                <a14:useLocalDpi xmlns:a14="http://schemas.microsoft.com/office/drawing/2010/main" val="0"/>
+              </a:ext>
+            </a:extLst>
+          </a:blip>
+          <a:stretch>
+            <a:fillRect/>
+          </a:stretch>
+        </p:blipFill>
+        <p:spPr>
+          <a:xfrm>
+            <a:off x="222738" y="633558"/>
+            <a:ext cx="2936630" cy="1768275"/>
+          </a:xfrm>
+          <a:prstGeom prst="rect">
+            <a:avLst/>
+          </a:prstGeom>
+        </p:spPr>
+      </p:pic>
+      <p:pic>
+        <p:nvPicPr>
+          <p:cNvPr id="11" name="Picture 10">
+            <a:extLst>
+              <a:ext uri="{FF2B5EF4-FFF2-40B4-BE49-F238E27FC236}">
+                <a16:creationId xmlns:a16="http://schemas.microsoft.com/office/drawing/2014/main" id="{5BEC617C-BABD-17E1-D9ED-CE340FFBE5DE}"/>
+              </a:ext>
+            </a:extLst>
+          </p:cNvPr>
+          <p:cNvPicPr>
+            <a:picLocks noChangeAspect="1"/>
+          </p:cNvPicPr>
+          <p:nvPr/>
+        </p:nvPicPr>
+        <p:blipFill>
+          <a:blip r:embed="rId5">
+            <a:extLst>
+              <a:ext uri="{28A0092B-C50C-407E-A947-70E740481C1C}">
+                <a14:useLocalDpi xmlns:a14="http://schemas.microsoft.com/office/drawing/2010/main" val="0"/>
+              </a:ext>
+            </a:extLst>
+          </a:blip>
+          <a:stretch>
+            <a:fillRect/>
+          </a:stretch>
+        </p:blipFill>
+        <p:spPr>
+          <a:xfrm>
+            <a:off x="2971434" y="633558"/>
+            <a:ext cx="3225493" cy="1942212"/>
+          </a:xfrm>
+          <a:prstGeom prst="rect">
+            <a:avLst/>
+          </a:prstGeom>
+        </p:spPr>
+      </p:pic>
+      <p:sp>
+        <p:nvSpPr>
+          <p:cNvPr id="12" name="TextBox 11">
+            <a:extLst>
+              <a:ext uri="{FF2B5EF4-FFF2-40B4-BE49-F238E27FC236}">
+                <a16:creationId xmlns:a16="http://schemas.microsoft.com/office/drawing/2014/main" id="{281AB649-D6D7-84C8-DCC8-93C2A35B8BAF}"/>
+              </a:ext>
+            </a:extLst>
+          </p:cNvPr>
+          <p:cNvSpPr txBox="1"/>
+          <p:nvPr/>
+        </p:nvSpPr>
+        <p:spPr>
+          <a:xfrm>
+            <a:off x="2971434" y="371475"/>
+            <a:ext cx="1088760" cy="369332"/>
+          </a:xfrm>
+          <a:prstGeom prst="rect">
+            <a:avLst/>
+          </a:prstGeom>
+          <a:noFill/>
+        </p:spPr>
+        <p:txBody>
+          <a:bodyPr wrap="none" rtlCol="0">
+            <a:spAutoFit/>
+          </a:bodyPr>
+          <a:lstStyle/>
+          <a:p>
+            <a:r>
+              <a:rPr lang="en-US" dirty="0"/>
+              <a:t>SF 7 10.4</a:t>
+            </a:r>
+          </a:p>
+        </p:txBody>
+      </p:sp>
+      <p:pic>
+        <p:nvPicPr>
+          <p:cNvPr id="14" name="Picture 13">
+            <a:extLst>
+              <a:ext uri="{FF2B5EF4-FFF2-40B4-BE49-F238E27FC236}">
+                <a16:creationId xmlns:a16="http://schemas.microsoft.com/office/drawing/2014/main" id="{36BF4612-B888-6ACA-CF93-B00B7D15134D}"/>
+              </a:ext>
+            </a:extLst>
+          </p:cNvPr>
+          <p:cNvPicPr>
+            <a:picLocks noChangeAspect="1"/>
+          </p:cNvPicPr>
+          <p:nvPr/>
+        </p:nvPicPr>
+        <p:blipFill>
+          <a:blip r:embed="rId6">
+            <a:extLst>
+              <a:ext uri="{28A0092B-C50C-407E-A947-70E740481C1C}">
+                <a14:useLocalDpi xmlns:a14="http://schemas.microsoft.com/office/drawing/2010/main" val="0"/>
+              </a:ext>
+            </a:extLst>
+          </a:blip>
+          <a:stretch>
+            <a:fillRect/>
+          </a:stretch>
+        </p:blipFill>
+        <p:spPr>
+          <a:xfrm>
+            <a:off x="222737" y="4384874"/>
+            <a:ext cx="2936631" cy="1768275"/>
+          </a:xfrm>
+          <a:prstGeom prst="rect">
+            <a:avLst/>
+          </a:prstGeom>
+        </p:spPr>
+      </p:pic>
+      <p:pic>
+        <p:nvPicPr>
+          <p:cNvPr id="16" name="Picture 15">
+            <a:extLst>
+              <a:ext uri="{FF2B5EF4-FFF2-40B4-BE49-F238E27FC236}">
+                <a16:creationId xmlns:a16="http://schemas.microsoft.com/office/drawing/2014/main" id="{159C4122-648E-5C63-A63B-A30C0CE6B746}"/>
+              </a:ext>
+            </a:extLst>
+          </p:cNvPr>
+          <p:cNvPicPr>
+            <a:picLocks noChangeAspect="1"/>
+          </p:cNvPicPr>
+          <p:nvPr/>
+        </p:nvPicPr>
+        <p:blipFill>
+          <a:blip r:embed="rId7">
+            <a:extLst>
+              <a:ext uri="{28A0092B-C50C-407E-A947-70E740481C1C}">
+                <a14:useLocalDpi xmlns:a14="http://schemas.microsoft.com/office/drawing/2010/main" val="0"/>
+              </a:ext>
+            </a:extLst>
+          </a:blip>
+          <a:stretch>
+            <a:fillRect/>
+          </a:stretch>
+        </p:blipFill>
+        <p:spPr>
+          <a:xfrm>
+            <a:off x="3159368" y="4486274"/>
+            <a:ext cx="2768232" cy="1666875"/>
+          </a:xfrm>
+          <a:prstGeom prst="rect">
+            <a:avLst/>
+          </a:prstGeom>
+        </p:spPr>
+      </p:pic>
+      <p:pic>
+        <p:nvPicPr>
+          <p:cNvPr id="18" name="Picture 17">
+            <a:extLst>
+              <a:ext uri="{FF2B5EF4-FFF2-40B4-BE49-F238E27FC236}">
+                <a16:creationId xmlns:a16="http://schemas.microsoft.com/office/drawing/2014/main" id="{75361BF4-B98D-F3A6-34B7-27F9491C92FA}"/>
+              </a:ext>
+            </a:extLst>
+          </p:cNvPr>
+          <p:cNvPicPr>
+            <a:picLocks noChangeAspect="1"/>
+          </p:cNvPicPr>
+          <p:nvPr/>
+        </p:nvPicPr>
+        <p:blipFill>
+          <a:blip r:embed="rId8">
+            <a:extLst>
+              <a:ext uri="{28A0092B-C50C-407E-A947-70E740481C1C}">
+                <a14:useLocalDpi xmlns:a14="http://schemas.microsoft.com/office/drawing/2010/main" val="0"/>
+              </a:ext>
+            </a:extLst>
+          </a:blip>
+          <a:stretch>
+            <a:fillRect/>
+          </a:stretch>
+        </p:blipFill>
+        <p:spPr>
+          <a:xfrm>
+            <a:off x="6852505" y="4486274"/>
+            <a:ext cx="2490788" cy="1867379"/>
+          </a:xfrm>
+          <a:prstGeom prst="rect">
+            <a:avLst/>
+          </a:prstGeom>
+        </p:spPr>
+      </p:pic>
+      <p:pic>
+        <p:nvPicPr>
+          <p:cNvPr id="20" name="Picture 19">
+            <a:extLst>
+              <a:ext uri="{FF2B5EF4-FFF2-40B4-BE49-F238E27FC236}">
+                <a16:creationId xmlns:a16="http://schemas.microsoft.com/office/drawing/2014/main" id="{BDC24979-9B9B-6B63-389B-F9DC33DEDD98}"/>
+              </a:ext>
+            </a:extLst>
+          </p:cNvPr>
+          <p:cNvPicPr>
+            <a:picLocks noChangeAspect="1"/>
+          </p:cNvPicPr>
+          <p:nvPr/>
+        </p:nvPicPr>
+        <p:blipFill>
+          <a:blip r:embed="rId9">
+            <a:extLst>
+              <a:ext uri="{28A0092B-C50C-407E-A947-70E740481C1C}">
+                <a14:useLocalDpi xmlns:a14="http://schemas.microsoft.com/office/drawing/2010/main" val="0"/>
+              </a:ext>
+            </a:extLst>
+          </a:blip>
+          <a:stretch>
+            <a:fillRect/>
+          </a:stretch>
+        </p:blipFill>
+        <p:spPr>
+          <a:xfrm>
+            <a:off x="9349519" y="4486274"/>
+            <a:ext cx="2490788" cy="1867379"/>
+          </a:xfrm>
+          <a:prstGeom prst="rect">
+            <a:avLst/>
+          </a:prstGeom>
+        </p:spPr>
+      </p:pic>
+      <p:sp>
+        <p:nvSpPr>
+          <p:cNvPr id="21" name="TextBox 20">
+            <a:extLst>
+              <a:ext uri="{FF2B5EF4-FFF2-40B4-BE49-F238E27FC236}">
+                <a16:creationId xmlns:a16="http://schemas.microsoft.com/office/drawing/2014/main" id="{BA2AFCDA-39AE-26C7-4C5E-2F97258CBB79}"/>
+              </a:ext>
+            </a:extLst>
+          </p:cNvPr>
+          <p:cNvSpPr txBox="1"/>
+          <p:nvPr/>
+        </p:nvSpPr>
+        <p:spPr>
+          <a:xfrm>
+            <a:off x="2614988" y="3881576"/>
+            <a:ext cx="1135247" cy="369332"/>
+          </a:xfrm>
+          <a:prstGeom prst="rect">
+            <a:avLst/>
+          </a:prstGeom>
+          <a:noFill/>
+        </p:spPr>
+        <p:txBody>
+          <a:bodyPr wrap="none" rtlCol="0">
+            <a:spAutoFit/>
+          </a:bodyPr>
+          <a:lstStyle/>
+          <a:p>
+            <a:r>
+              <a:rPr lang="en-US" dirty="0"/>
+              <a:t>SF 7 500k</a:t>
+            </a:r>
+          </a:p>
+        </p:txBody>
+      </p:sp>
+      <p:sp>
+        <p:nvSpPr>
+          <p:cNvPr id="22" name="TextBox 21">
+            <a:extLst>
+              <a:ext uri="{FF2B5EF4-FFF2-40B4-BE49-F238E27FC236}">
+                <a16:creationId xmlns:a16="http://schemas.microsoft.com/office/drawing/2014/main" id="{7BF55E90-D595-EC8F-AF1A-DC1867634990}"/>
+              </a:ext>
+            </a:extLst>
+          </p:cNvPr>
+          <p:cNvSpPr txBox="1"/>
+          <p:nvPr/>
+        </p:nvSpPr>
+        <p:spPr>
+          <a:xfrm>
+            <a:off x="8676186" y="3893742"/>
+            <a:ext cx="1258678" cy="369332"/>
+          </a:xfrm>
+          <a:prstGeom prst="rect">
+            <a:avLst/>
+          </a:prstGeom>
+          <a:noFill/>
+        </p:spPr>
+        <p:txBody>
+          <a:bodyPr wrap="none" rtlCol="0">
+            <a:spAutoFit/>
+          </a:bodyPr>
+          <a:lstStyle/>
+          <a:p>
+            <a:r>
+              <a:rPr lang="en-US" dirty="0"/>
+              <a:t>SF 12 500k</a:t>
+            </a:r>
+          </a:p>
+        </p:txBody>
+      </p:sp>
+      <p:sp>
+        <p:nvSpPr>
+          <p:cNvPr id="23" name="TextBox 22">
+            <a:extLst>
+              <a:ext uri="{FF2B5EF4-FFF2-40B4-BE49-F238E27FC236}">
+                <a16:creationId xmlns:a16="http://schemas.microsoft.com/office/drawing/2014/main" id="{25BDF06A-2EF1-9157-D712-B0A035132DF5}"/>
+              </a:ext>
+            </a:extLst>
+          </p:cNvPr>
+          <p:cNvSpPr txBox="1"/>
+          <p:nvPr/>
+        </p:nvSpPr>
+        <p:spPr>
+          <a:xfrm>
+            <a:off x="8608604" y="252946"/>
+            <a:ext cx="1792478" cy="369332"/>
+          </a:xfrm>
+          <a:prstGeom prst="rect">
+            <a:avLst/>
+          </a:prstGeom>
+          <a:noFill/>
+        </p:spPr>
+        <p:txBody>
+          <a:bodyPr wrap="none" rtlCol="0">
+            <a:spAutoFit/>
+          </a:bodyPr>
+          <a:lstStyle/>
+          <a:p>
+            <a:r>
+              <a:rPr lang="en-US" dirty="0"/>
+              <a:t>Comparison WF</a:t>
+            </a:r>
+          </a:p>
+        </p:txBody>
+      </p:sp>
+      <p:sp>
+        <p:nvSpPr>
+          <p:cNvPr id="24" name="TextBox 23">
+            <a:extLst>
+              <a:ext uri="{FF2B5EF4-FFF2-40B4-BE49-F238E27FC236}">
+                <a16:creationId xmlns:a16="http://schemas.microsoft.com/office/drawing/2014/main" id="{60255050-1B51-C413-D691-0928805B5273}"/>
+              </a:ext>
+            </a:extLst>
+          </p:cNvPr>
+          <p:cNvSpPr txBox="1"/>
+          <p:nvPr/>
+        </p:nvSpPr>
+        <p:spPr>
+          <a:xfrm>
+            <a:off x="1243388" y="2663916"/>
+            <a:ext cx="971997" cy="369332"/>
+          </a:xfrm>
+          <a:prstGeom prst="rect">
+            <a:avLst/>
+          </a:prstGeom>
+          <a:noFill/>
+        </p:spPr>
+        <p:txBody>
+          <a:bodyPr wrap="none" rtlCol="0">
+            <a:spAutoFit/>
+          </a:bodyPr>
+          <a:lstStyle/>
+          <a:p>
+            <a:r>
+              <a:rPr lang="en-US" dirty="0"/>
+              <a:t>-10 SNR</a:t>
+            </a:r>
+          </a:p>
+        </p:txBody>
+      </p:sp>
+      <p:sp>
+        <p:nvSpPr>
+          <p:cNvPr id="25" name="TextBox 24">
+            <a:extLst>
+              <a:ext uri="{FF2B5EF4-FFF2-40B4-BE49-F238E27FC236}">
+                <a16:creationId xmlns:a16="http://schemas.microsoft.com/office/drawing/2014/main" id="{B9EB2583-1505-B79A-1506-EAE3FBD47FEA}"/>
+              </a:ext>
+            </a:extLst>
+          </p:cNvPr>
+          <p:cNvSpPr txBox="1"/>
+          <p:nvPr/>
+        </p:nvSpPr>
+        <p:spPr>
+          <a:xfrm>
+            <a:off x="4033939" y="6153149"/>
+            <a:ext cx="971997" cy="369332"/>
+          </a:xfrm>
+          <a:prstGeom prst="rect">
+            <a:avLst/>
+          </a:prstGeom>
+          <a:noFill/>
+        </p:spPr>
+        <p:txBody>
+          <a:bodyPr wrap="none" rtlCol="0">
+            <a:spAutoFit/>
+          </a:bodyPr>
+          <a:lstStyle/>
+          <a:p>
+            <a:r>
+              <a:rPr lang="en-US" dirty="0"/>
+              <a:t>-10 SNR</a:t>
+            </a:r>
+          </a:p>
+        </p:txBody>
+      </p:sp>
+      <p:sp>
+        <p:nvSpPr>
+          <p:cNvPr id="26" name="TextBox 25">
+            <a:extLst>
+              <a:ext uri="{FF2B5EF4-FFF2-40B4-BE49-F238E27FC236}">
+                <a16:creationId xmlns:a16="http://schemas.microsoft.com/office/drawing/2014/main" id="{1E1A5776-65EF-228F-2989-A688EB2BABBD}"/>
+              </a:ext>
+            </a:extLst>
+          </p:cNvPr>
+          <p:cNvSpPr txBox="1"/>
+          <p:nvPr/>
+        </p:nvSpPr>
+        <p:spPr>
+          <a:xfrm>
+            <a:off x="4164388" y="2733766"/>
+            <a:ext cx="971997" cy="369332"/>
+          </a:xfrm>
+          <a:prstGeom prst="rect">
+            <a:avLst/>
+          </a:prstGeom>
+          <a:noFill/>
+        </p:spPr>
+        <p:txBody>
+          <a:bodyPr wrap="none" rtlCol="0">
+            <a:spAutoFit/>
+          </a:bodyPr>
+          <a:lstStyle/>
+          <a:p>
+            <a:r>
+              <a:rPr lang="en-US" dirty="0"/>
+              <a:t>-15 SNR</a:t>
+            </a:r>
+          </a:p>
+        </p:txBody>
+      </p:sp>
+      <p:sp>
+        <p:nvSpPr>
+          <p:cNvPr id="27" name="TextBox 26">
+            <a:extLst>
+              <a:ext uri="{FF2B5EF4-FFF2-40B4-BE49-F238E27FC236}">
+                <a16:creationId xmlns:a16="http://schemas.microsoft.com/office/drawing/2014/main" id="{281486D6-C06E-7AD4-197C-FE3203FEEB23}"/>
+              </a:ext>
+            </a:extLst>
+          </p:cNvPr>
+          <p:cNvSpPr txBox="1"/>
+          <p:nvPr/>
+        </p:nvSpPr>
+        <p:spPr>
+          <a:xfrm>
+            <a:off x="10108914" y="6392187"/>
+            <a:ext cx="971997" cy="369332"/>
+          </a:xfrm>
+          <a:prstGeom prst="rect">
+            <a:avLst/>
+          </a:prstGeom>
+          <a:noFill/>
+        </p:spPr>
+        <p:txBody>
+          <a:bodyPr wrap="none" rtlCol="0">
+            <a:spAutoFit/>
+          </a:bodyPr>
+          <a:lstStyle/>
+          <a:p>
+            <a:r>
+              <a:rPr lang="en-US" dirty="0"/>
+              <a:t>-10 SNR</a:t>
+            </a:r>
+          </a:p>
+        </p:txBody>
+      </p:sp>
+      <p:sp>
+        <p:nvSpPr>
+          <p:cNvPr id="28" name="TextBox 27">
+            <a:extLst>
+              <a:ext uri="{FF2B5EF4-FFF2-40B4-BE49-F238E27FC236}">
+                <a16:creationId xmlns:a16="http://schemas.microsoft.com/office/drawing/2014/main" id="{4FE20CAB-541E-B637-F8B7-D8C914ED3133}"/>
+              </a:ext>
+            </a:extLst>
+          </p:cNvPr>
+          <p:cNvSpPr txBox="1"/>
+          <p:nvPr/>
+        </p:nvSpPr>
+        <p:spPr>
+          <a:xfrm>
+            <a:off x="10269913" y="2895055"/>
+            <a:ext cx="989373" cy="369332"/>
+          </a:xfrm>
+          <a:prstGeom prst="rect">
+            <a:avLst/>
+          </a:prstGeom>
+          <a:noFill/>
+        </p:spPr>
+        <p:txBody>
+          <a:bodyPr wrap="none" rtlCol="0">
+            <a:spAutoFit/>
+          </a:bodyPr>
+          <a:lstStyle/>
+          <a:p>
+            <a:r>
+              <a:rPr lang="en-US" dirty="0"/>
+              <a:t>-25 SNR</a:t>
+            </a:r>
+          </a:p>
+        </p:txBody>
+      </p:sp>
+      <p:sp>
+        <p:nvSpPr>
+          <p:cNvPr id="29" name="TextBox 28">
+            <a:extLst>
+              <a:ext uri="{FF2B5EF4-FFF2-40B4-BE49-F238E27FC236}">
+                <a16:creationId xmlns:a16="http://schemas.microsoft.com/office/drawing/2014/main" id="{D40D86F6-77B3-A54C-76D5-F8825C428AE7}"/>
+              </a:ext>
+            </a:extLst>
+          </p:cNvPr>
+          <p:cNvSpPr txBox="1"/>
+          <p:nvPr/>
+        </p:nvSpPr>
+        <p:spPr>
+          <a:xfrm>
+            <a:off x="7450513" y="2771716"/>
+            <a:ext cx="989373" cy="369332"/>
+          </a:xfrm>
+          <a:prstGeom prst="rect">
+            <a:avLst/>
+          </a:prstGeom>
+          <a:noFill/>
+        </p:spPr>
+        <p:txBody>
+          <a:bodyPr wrap="none" rtlCol="0">
+            <a:spAutoFit/>
+          </a:bodyPr>
+          <a:lstStyle/>
+          <a:p>
+            <a:r>
+              <a:rPr lang="en-US" dirty="0"/>
+              <a:t>-20 SNR</a:t>
+            </a:r>
+          </a:p>
+        </p:txBody>
+      </p:sp>
+      <p:sp>
+        <p:nvSpPr>
+          <p:cNvPr id="30" name="TextBox 29">
+            <a:extLst>
+              <a:ext uri="{FF2B5EF4-FFF2-40B4-BE49-F238E27FC236}">
+                <a16:creationId xmlns:a16="http://schemas.microsoft.com/office/drawing/2014/main" id="{5134B292-2D32-ACAC-A929-1191028A3E98}"/>
+              </a:ext>
+            </a:extLst>
+          </p:cNvPr>
+          <p:cNvSpPr txBox="1"/>
+          <p:nvPr/>
+        </p:nvSpPr>
+        <p:spPr>
+          <a:xfrm>
+            <a:off x="7664927" y="6460093"/>
+            <a:ext cx="865943" cy="369332"/>
+          </a:xfrm>
+          <a:prstGeom prst="rect">
+            <a:avLst/>
+          </a:prstGeom>
+          <a:noFill/>
+        </p:spPr>
+        <p:txBody>
+          <a:bodyPr wrap="none" rtlCol="0">
+            <a:spAutoFit/>
+          </a:bodyPr>
+          <a:lstStyle/>
+          <a:p>
+            <a:r>
+              <a:rPr lang="en-US" dirty="0"/>
+              <a:t>-5 SNR</a:t>
+            </a:r>
+          </a:p>
+        </p:txBody>
+      </p:sp>
+      <p:sp>
+        <p:nvSpPr>
+          <p:cNvPr id="31" name="TextBox 30">
+            <a:extLst>
+              <a:ext uri="{FF2B5EF4-FFF2-40B4-BE49-F238E27FC236}">
+                <a16:creationId xmlns:a16="http://schemas.microsoft.com/office/drawing/2014/main" id="{6C56D25F-6154-F9A4-6B65-FD46AF1A4AD4}"/>
+              </a:ext>
+            </a:extLst>
+          </p:cNvPr>
+          <p:cNvSpPr txBox="1"/>
+          <p:nvPr/>
+        </p:nvSpPr>
+        <p:spPr>
+          <a:xfrm>
+            <a:off x="1296414" y="6224442"/>
+            <a:ext cx="865943" cy="369332"/>
+          </a:xfrm>
+          <a:prstGeom prst="rect">
+            <a:avLst/>
+          </a:prstGeom>
+          <a:noFill/>
+        </p:spPr>
+        <p:txBody>
+          <a:bodyPr wrap="none" rtlCol="0">
+            <a:spAutoFit/>
+          </a:bodyPr>
+          <a:lstStyle/>
+          <a:p>
+            <a:r>
+              <a:rPr lang="en-US" dirty="0"/>
+              <a:t>-5 SNR</a:t>
+            </a:r>
+          </a:p>
+        </p:txBody>
+      </p:sp>
+    </p:spTree>
+    <p:extLst>
+      <p:ext uri="{BB962C8B-B14F-4D97-AF65-F5344CB8AC3E}">
+        <p14:creationId xmlns:p14="http://schemas.microsoft.com/office/powerpoint/2010/main" val="2189355242"/>
+      </p:ext>
+    </p:extLst>
+  </p:cSld>
+  <p:clrMapOvr>
+    <a:masterClrMapping/>
+  </p:clrMapOvr>
+</p:sld>
+</file>
+
+<file path=ppt/slides/slide7.xml><?xml version="1.0" encoding="utf-8"?>
+<p:sld xmlns:a="http://schemas.openxmlformats.org/drawingml/2006/main" xmlns:r="http://schemas.openxmlformats.org/officeDocument/2006/relationships" xmlns:p="http://schemas.openxmlformats.org/presentationml/2006/main">
+  <p:cSld>
+    <p:spTree>
+      <p:nvGrpSpPr>
+        <p:cNvPr id="1" name="">
+          <a:extLst>
+            <a:ext uri="{FF2B5EF4-FFF2-40B4-BE49-F238E27FC236}">
+              <a16:creationId xmlns:a16="http://schemas.microsoft.com/office/drawing/2014/main" id="{700458FE-ABAB-65BA-4526-4AD6939793E2}"/>
+            </a:ext>
+          </a:extLst>
+        </p:cNvPr>
+        <p:cNvGrpSpPr/>
+        <p:nvPr/>
+      </p:nvGrpSpPr>
+      <p:grpSpPr>
+        <a:xfrm>
+          <a:off x="0" y="0"/>
+          <a:ext cx="0" cy="0"/>
+          <a:chOff x="0" y="0"/>
+          <a:chExt cx="0" cy="0"/>
+        </a:xfrm>
+      </p:grpSpPr>
+      <p:pic>
+        <p:nvPicPr>
+          <p:cNvPr id="9" name="Picture 8">
+            <a:extLst>
+              <a:ext uri="{FF2B5EF4-FFF2-40B4-BE49-F238E27FC236}">
+                <a16:creationId xmlns:a16="http://schemas.microsoft.com/office/drawing/2014/main" id="{6C82C886-DBE2-4D9C-9759-F8A7EFE3DE9E}"/>
+              </a:ext>
+            </a:extLst>
+          </p:cNvPr>
+          <p:cNvPicPr>
+            <a:picLocks noChangeAspect="1"/>
+          </p:cNvPicPr>
+          <p:nvPr/>
+        </p:nvPicPr>
+        <p:blipFill>
+          <a:blip r:embed="rId2">
+            <a:extLst>
+              <a:ext uri="{28A0092B-C50C-407E-A947-70E740481C1C}">
+                <a14:useLocalDpi xmlns:a14="http://schemas.microsoft.com/office/drawing/2010/main" val="0"/>
+              </a:ext>
+            </a:extLst>
+          </a:blip>
+          <a:stretch>
+            <a:fillRect/>
+          </a:stretch>
+        </p:blipFill>
+        <p:spPr>
+          <a:xfrm>
+            <a:off x="222738" y="633558"/>
+            <a:ext cx="2936630" cy="1768275"/>
+          </a:xfrm>
+          <a:prstGeom prst="rect">
+            <a:avLst/>
+          </a:prstGeom>
+        </p:spPr>
+      </p:pic>
+      <p:pic>
+        <p:nvPicPr>
+          <p:cNvPr id="11" name="Picture 10">
+            <a:extLst>
+              <a:ext uri="{FF2B5EF4-FFF2-40B4-BE49-F238E27FC236}">
+                <a16:creationId xmlns:a16="http://schemas.microsoft.com/office/drawing/2014/main" id="{D6914259-231B-B281-44ED-4209A7A339F3}"/>
+              </a:ext>
+            </a:extLst>
+          </p:cNvPr>
+          <p:cNvPicPr>
+            <a:picLocks noChangeAspect="1"/>
+          </p:cNvPicPr>
+          <p:nvPr/>
+        </p:nvPicPr>
+        <p:blipFill>
+          <a:blip r:embed="rId3">
+            <a:extLst>
+              <a:ext uri="{28A0092B-C50C-407E-A947-70E740481C1C}">
+                <a14:useLocalDpi xmlns:a14="http://schemas.microsoft.com/office/drawing/2010/main" val="0"/>
+              </a:ext>
+            </a:extLst>
+          </a:blip>
+          <a:stretch>
+            <a:fillRect/>
+          </a:stretch>
+        </p:blipFill>
+        <p:spPr>
+          <a:xfrm>
+            <a:off x="2971434" y="633558"/>
+            <a:ext cx="3225493" cy="1942212"/>
+          </a:xfrm>
+          <a:prstGeom prst="rect">
+            <a:avLst/>
+          </a:prstGeom>
+        </p:spPr>
+      </p:pic>
+      <p:sp>
+        <p:nvSpPr>
+          <p:cNvPr id="12" name="TextBox 11">
+            <a:extLst>
+              <a:ext uri="{FF2B5EF4-FFF2-40B4-BE49-F238E27FC236}">
+                <a16:creationId xmlns:a16="http://schemas.microsoft.com/office/drawing/2014/main" id="{E970CCC7-3F30-02A5-4F2B-01785142E576}"/>
+              </a:ext>
+            </a:extLst>
+          </p:cNvPr>
+          <p:cNvSpPr txBox="1"/>
+          <p:nvPr/>
+        </p:nvSpPr>
+        <p:spPr>
+          <a:xfrm>
+            <a:off x="2971434" y="371475"/>
+            <a:ext cx="1088760" cy="369332"/>
+          </a:xfrm>
+          <a:prstGeom prst="rect">
+            <a:avLst/>
+          </a:prstGeom>
+          <a:noFill/>
+        </p:spPr>
+        <p:txBody>
+          <a:bodyPr wrap="none" rtlCol="0">
+            <a:spAutoFit/>
+          </a:bodyPr>
+          <a:lstStyle/>
+          <a:p>
+            <a:r>
+              <a:rPr lang="en-US" dirty="0"/>
+              <a:t>SF 7 10.4</a:t>
+            </a:r>
+          </a:p>
+        </p:txBody>
+      </p:sp>
+      <p:pic>
+        <p:nvPicPr>
+          <p:cNvPr id="14" name="Picture 13">
+            <a:extLst>
+              <a:ext uri="{FF2B5EF4-FFF2-40B4-BE49-F238E27FC236}">
+                <a16:creationId xmlns:a16="http://schemas.microsoft.com/office/drawing/2014/main" id="{A99BA78A-2229-F4FC-CF1A-F2F397D22CB2}"/>
+              </a:ext>
+            </a:extLst>
+          </p:cNvPr>
+          <p:cNvPicPr>
+            <a:picLocks noChangeAspect="1"/>
+          </p:cNvPicPr>
+          <p:nvPr/>
+        </p:nvPicPr>
+        <p:blipFill>
+          <a:blip r:embed="rId4">
+            <a:extLst>
+              <a:ext uri="{28A0092B-C50C-407E-A947-70E740481C1C}">
+                <a14:useLocalDpi xmlns:a14="http://schemas.microsoft.com/office/drawing/2010/main" val="0"/>
+              </a:ext>
+            </a:extLst>
+          </a:blip>
+          <a:stretch>
+            <a:fillRect/>
+          </a:stretch>
+        </p:blipFill>
+        <p:spPr>
+          <a:xfrm>
+            <a:off x="222737" y="4384874"/>
+            <a:ext cx="2936631" cy="1768275"/>
+          </a:xfrm>
+          <a:prstGeom prst="rect">
+            <a:avLst/>
+          </a:prstGeom>
+        </p:spPr>
+      </p:pic>
+      <p:pic>
+        <p:nvPicPr>
+          <p:cNvPr id="16" name="Picture 15">
+            <a:extLst>
+              <a:ext uri="{FF2B5EF4-FFF2-40B4-BE49-F238E27FC236}">
+                <a16:creationId xmlns:a16="http://schemas.microsoft.com/office/drawing/2014/main" id="{E81792D7-BAF4-53C6-D25E-8A865CD9E42B}"/>
+              </a:ext>
+            </a:extLst>
+          </p:cNvPr>
+          <p:cNvPicPr>
+            <a:picLocks noChangeAspect="1"/>
+          </p:cNvPicPr>
+          <p:nvPr/>
+        </p:nvPicPr>
+        <p:blipFill>
+          <a:blip r:embed="rId5">
+            <a:extLst>
+              <a:ext uri="{28A0092B-C50C-407E-A947-70E740481C1C}">
+                <a14:useLocalDpi xmlns:a14="http://schemas.microsoft.com/office/drawing/2010/main" val="0"/>
+              </a:ext>
+            </a:extLst>
+          </a:blip>
+          <a:stretch>
+            <a:fillRect/>
+          </a:stretch>
+        </p:blipFill>
+        <p:spPr>
+          <a:xfrm>
+            <a:off x="3159368" y="4486274"/>
+            <a:ext cx="2768232" cy="1666875"/>
+          </a:xfrm>
+          <a:prstGeom prst="rect">
+            <a:avLst/>
+          </a:prstGeom>
+        </p:spPr>
+      </p:pic>
+      <p:sp>
+        <p:nvSpPr>
+          <p:cNvPr id="21" name="TextBox 20">
+            <a:extLst>
+              <a:ext uri="{FF2B5EF4-FFF2-40B4-BE49-F238E27FC236}">
+                <a16:creationId xmlns:a16="http://schemas.microsoft.com/office/drawing/2014/main" id="{812551E1-5457-8272-3782-BB063407A73A}"/>
+              </a:ext>
+            </a:extLst>
+          </p:cNvPr>
+          <p:cNvSpPr txBox="1"/>
+          <p:nvPr/>
+        </p:nvSpPr>
+        <p:spPr>
+          <a:xfrm>
+            <a:off x="2614988" y="3881576"/>
+            <a:ext cx="1135247" cy="369332"/>
+          </a:xfrm>
+          <a:prstGeom prst="rect">
+            <a:avLst/>
+          </a:prstGeom>
+          <a:noFill/>
+        </p:spPr>
+        <p:txBody>
+          <a:bodyPr wrap="none" rtlCol="0">
+            <a:spAutoFit/>
+          </a:bodyPr>
+          <a:lstStyle/>
+          <a:p>
+            <a:r>
+              <a:rPr lang="en-US" dirty="0"/>
+              <a:t>SF 7 500k</a:t>
+            </a:r>
+          </a:p>
+        </p:txBody>
+      </p:sp>
+      <p:sp>
+        <p:nvSpPr>
+          <p:cNvPr id="24" name="TextBox 23">
+            <a:extLst>
+              <a:ext uri="{FF2B5EF4-FFF2-40B4-BE49-F238E27FC236}">
+                <a16:creationId xmlns:a16="http://schemas.microsoft.com/office/drawing/2014/main" id="{14875138-B59F-43D0-8C20-94CC103D9D3A}"/>
+              </a:ext>
+            </a:extLst>
+          </p:cNvPr>
+          <p:cNvSpPr txBox="1"/>
+          <p:nvPr/>
+        </p:nvSpPr>
+        <p:spPr>
+          <a:xfrm>
+            <a:off x="1243388" y="2663916"/>
+            <a:ext cx="971997" cy="369332"/>
+          </a:xfrm>
+          <a:prstGeom prst="rect">
+            <a:avLst/>
+          </a:prstGeom>
+          <a:noFill/>
+        </p:spPr>
+        <p:txBody>
+          <a:bodyPr wrap="none" rtlCol="0">
+            <a:spAutoFit/>
+          </a:bodyPr>
+          <a:lstStyle/>
+          <a:p>
+            <a:r>
+              <a:rPr lang="en-US" dirty="0"/>
+              <a:t>-10 SNR</a:t>
+            </a:r>
+          </a:p>
+        </p:txBody>
+      </p:sp>
+      <p:sp>
+        <p:nvSpPr>
+          <p:cNvPr id="25" name="TextBox 24">
+            <a:extLst>
+              <a:ext uri="{FF2B5EF4-FFF2-40B4-BE49-F238E27FC236}">
+                <a16:creationId xmlns:a16="http://schemas.microsoft.com/office/drawing/2014/main" id="{23E2D5CE-85D1-8FA6-4375-587FE059CD86}"/>
+              </a:ext>
+            </a:extLst>
+          </p:cNvPr>
+          <p:cNvSpPr txBox="1"/>
+          <p:nvPr/>
+        </p:nvSpPr>
+        <p:spPr>
+          <a:xfrm>
+            <a:off x="4033939" y="6153149"/>
+            <a:ext cx="971997" cy="369332"/>
+          </a:xfrm>
+          <a:prstGeom prst="rect">
+            <a:avLst/>
+          </a:prstGeom>
+          <a:noFill/>
+        </p:spPr>
+        <p:txBody>
+          <a:bodyPr wrap="none" rtlCol="0">
+            <a:spAutoFit/>
+          </a:bodyPr>
+          <a:lstStyle/>
+          <a:p>
+            <a:r>
+              <a:rPr lang="en-US" dirty="0"/>
+              <a:t>-10 SNR</a:t>
+            </a:r>
+          </a:p>
+        </p:txBody>
+      </p:sp>
+      <p:sp>
+        <p:nvSpPr>
+          <p:cNvPr id="26" name="TextBox 25">
+            <a:extLst>
+              <a:ext uri="{FF2B5EF4-FFF2-40B4-BE49-F238E27FC236}">
+                <a16:creationId xmlns:a16="http://schemas.microsoft.com/office/drawing/2014/main" id="{D1CA45BD-18EE-5C6A-B741-11C90E5B2EAB}"/>
+              </a:ext>
+            </a:extLst>
+          </p:cNvPr>
+          <p:cNvSpPr txBox="1"/>
+          <p:nvPr/>
+        </p:nvSpPr>
+        <p:spPr>
+          <a:xfrm>
+            <a:off x="4164388" y="2733766"/>
+            <a:ext cx="971997" cy="369332"/>
+          </a:xfrm>
+          <a:prstGeom prst="rect">
+            <a:avLst/>
+          </a:prstGeom>
+          <a:noFill/>
+        </p:spPr>
+        <p:txBody>
+          <a:bodyPr wrap="none" rtlCol="0">
+            <a:spAutoFit/>
+          </a:bodyPr>
+          <a:lstStyle/>
+          <a:p>
+            <a:r>
+              <a:rPr lang="en-US" dirty="0"/>
+              <a:t>-15 SNR</a:t>
+            </a:r>
+          </a:p>
+        </p:txBody>
+      </p:sp>
+      <p:sp>
+        <p:nvSpPr>
+          <p:cNvPr id="31" name="TextBox 30">
+            <a:extLst>
+              <a:ext uri="{FF2B5EF4-FFF2-40B4-BE49-F238E27FC236}">
+                <a16:creationId xmlns:a16="http://schemas.microsoft.com/office/drawing/2014/main" id="{C6A31B74-0081-C5F9-709A-F70E7AC65C2D}"/>
+              </a:ext>
+            </a:extLst>
+          </p:cNvPr>
+          <p:cNvSpPr txBox="1"/>
+          <p:nvPr/>
+        </p:nvSpPr>
+        <p:spPr>
+          <a:xfrm>
+            <a:off x="1296414" y="6224442"/>
+            <a:ext cx="865943" cy="369332"/>
+          </a:xfrm>
+          <a:prstGeom prst="rect">
+            <a:avLst/>
+          </a:prstGeom>
+          <a:noFill/>
+        </p:spPr>
+        <p:txBody>
+          <a:bodyPr wrap="none" rtlCol="0">
+            <a:spAutoFit/>
+          </a:bodyPr>
+          <a:lstStyle/>
+          <a:p>
+            <a:r>
+              <a:rPr lang="en-US" dirty="0"/>
+              <a:t>-5 SNR</a:t>
+            </a:r>
+          </a:p>
+        </p:txBody>
+      </p:sp>
+      <p:sp>
+        <p:nvSpPr>
+          <p:cNvPr id="2" name="Content Placeholder 2">
+            <a:extLst>
+              <a:ext uri="{FF2B5EF4-FFF2-40B4-BE49-F238E27FC236}">
+                <a16:creationId xmlns:a16="http://schemas.microsoft.com/office/drawing/2014/main" id="{CA37B83D-6BB6-F4A2-D0B5-D0CBABBA29ED}"/>
+              </a:ext>
+            </a:extLst>
+          </p:cNvPr>
+          <p:cNvSpPr txBox="1">
+            <a:spLocks/>
+          </p:cNvSpPr>
+          <p:nvPr/>
+        </p:nvSpPr>
+        <p:spPr>
+          <a:xfrm>
+            <a:off x="8343790" y="1851768"/>
+            <a:ext cx="3535790" cy="2880251"/>
+          </a:xfrm>
+          <a:prstGeom prst="rect">
+            <a:avLst/>
+          </a:prstGeom>
+        </p:spPr>
+        <p:txBody>
+          <a:bodyPr vert="horz" lIns="91440" tIns="45720" rIns="91440" bIns="45720" rtlCol="0">
+            <a:normAutofit/>
+          </a:bodyPr>
+          <a:lstStyle>
+            <a:lvl1pPr marL="228600" indent="-228600" algn="l" defTabSz="914400" rtl="0" eaLnBrk="1" latinLnBrk="0" hangingPunct="1">
+              <a:lnSpc>
+                <a:spcPct val="90000"/>
+              </a:lnSpc>
+              <a:spcBef>
+                <a:spcPts val="1000"/>
+              </a:spcBef>
+              <a:buFont typeface="Arial" panose="020B0604020202020204" pitchFamily="34" charset="0"/>
+              <a:buChar char="•"/>
+              <a:defRPr sz="2800" kern="1200">
+                <a:solidFill>
+                  <a:schemeClr val="tx1"/>
+                </a:solidFill>
+                <a:latin typeface="+mn-lt"/>
+                <a:ea typeface="+mn-ea"/>
+                <a:cs typeface="+mn-cs"/>
+              </a:defRPr>
+            </a:lvl1pPr>
+            <a:lvl2pPr marL="685800" indent="-228600" algn="l" defTabSz="914400" rtl="0" eaLnBrk="1" latinLnBrk="0" hangingPunct="1">
+              <a:lnSpc>
+                <a:spcPct val="90000"/>
+              </a:lnSpc>
+              <a:spcBef>
+                <a:spcPts val="500"/>
+              </a:spcBef>
+              <a:buFont typeface="Arial" panose="020B0604020202020204" pitchFamily="34" charset="0"/>
+              <a:buChar char="•"/>
+              <a:defRPr sz="2400" kern="1200">
+                <a:solidFill>
+                  <a:schemeClr val="tx1"/>
+                </a:solidFill>
+                <a:latin typeface="+mn-lt"/>
+                <a:ea typeface="+mn-ea"/>
+                <a:cs typeface="+mn-cs"/>
+              </a:defRPr>
+            </a:lvl2pPr>
+            <a:lvl3pPr marL="1143000" indent="-228600" algn="l" defTabSz="914400" rtl="0" eaLnBrk="1" latinLnBrk="0" hangingPunct="1">
+              <a:lnSpc>
+                <a:spcPct val="90000"/>
+              </a:lnSpc>
+              <a:spcBef>
+                <a:spcPts val="500"/>
+              </a:spcBef>
+              <a:buFont typeface="Arial" panose="020B0604020202020204" pitchFamily="34" charset="0"/>
+              <a:buChar char="•"/>
+              <a:defRPr sz="2000" kern="1200">
+                <a:solidFill>
+                  <a:schemeClr val="tx1"/>
+                </a:solidFill>
+                <a:latin typeface="+mn-lt"/>
+                <a:ea typeface="+mn-ea"/>
+                <a:cs typeface="+mn-cs"/>
+              </a:defRPr>
+            </a:lvl3pPr>
+            <a:lvl4pPr marL="1600200" indent="-228600" algn="l" defTabSz="914400" rtl="0" eaLnBrk="1" latinLnBrk="0" hangingPunct="1">
+              <a:lnSpc>
+                <a:spcPct val="90000"/>
+              </a:lnSpc>
+              <a:spcBef>
+                <a:spcPts val="500"/>
+              </a:spcBef>
+              <a:buFont typeface="Arial" panose="020B0604020202020204" pitchFamily="34" charset="0"/>
+              <a:buChar char="•"/>
+              <a:defRPr sz="1800" kern="1200">
+                <a:solidFill>
+                  <a:schemeClr val="tx1"/>
+                </a:solidFill>
+                <a:latin typeface="+mn-lt"/>
+                <a:ea typeface="+mn-ea"/>
+                <a:cs typeface="+mn-cs"/>
+              </a:defRPr>
+            </a:lvl4pPr>
+            <a:lvl5pPr marL="2057400" indent="-228600" algn="l" defTabSz="914400" rtl="0" eaLnBrk="1" latinLnBrk="0" hangingPunct="1">
+              <a:lnSpc>
+                <a:spcPct val="90000"/>
+              </a:lnSpc>
+              <a:spcBef>
+                <a:spcPts val="500"/>
+              </a:spcBef>
+              <a:buFont typeface="Arial" panose="020B0604020202020204" pitchFamily="34" charset="0"/>
+              <a:buChar char="•"/>
+              <a:defRPr sz="1800" kern="1200">
+                <a:solidFill>
+                  <a:schemeClr val="tx1"/>
+                </a:solidFill>
+                <a:latin typeface="+mn-lt"/>
+                <a:ea typeface="+mn-ea"/>
+                <a:cs typeface="+mn-cs"/>
+              </a:defRPr>
+            </a:lvl5pPr>
+            <a:lvl6pPr marL="2514600" indent="-228600" algn="l" defTabSz="914400" rtl="0" eaLnBrk="1" latinLnBrk="0" hangingPunct="1">
+              <a:lnSpc>
+                <a:spcPct val="90000"/>
+              </a:lnSpc>
+              <a:spcBef>
+                <a:spcPts val="500"/>
+              </a:spcBef>
+              <a:buFont typeface="Arial" panose="020B0604020202020204" pitchFamily="34" charset="0"/>
+              <a:buChar char="•"/>
+              <a:defRPr sz="1800" kern="1200">
+                <a:solidFill>
+                  <a:schemeClr val="tx1"/>
+                </a:solidFill>
+                <a:latin typeface="+mn-lt"/>
+                <a:ea typeface="+mn-ea"/>
+                <a:cs typeface="+mn-cs"/>
+              </a:defRPr>
+            </a:lvl6pPr>
+            <a:lvl7pPr marL="2971800" indent="-228600" algn="l" defTabSz="914400" rtl="0" eaLnBrk="1" latinLnBrk="0" hangingPunct="1">
+              <a:lnSpc>
+                <a:spcPct val="90000"/>
+              </a:lnSpc>
+              <a:spcBef>
+                <a:spcPts val="500"/>
+              </a:spcBef>
+              <a:buFont typeface="Arial" panose="020B0604020202020204" pitchFamily="34" charset="0"/>
+              <a:buChar char="•"/>
+              <a:defRPr sz="1800" kern="1200">
+                <a:solidFill>
+                  <a:schemeClr val="tx1"/>
+                </a:solidFill>
+                <a:latin typeface="+mn-lt"/>
+                <a:ea typeface="+mn-ea"/>
+                <a:cs typeface="+mn-cs"/>
+              </a:defRPr>
+            </a:lvl7pPr>
+            <a:lvl8pPr marL="3429000" indent="-228600" algn="l" defTabSz="914400" rtl="0" eaLnBrk="1" latinLnBrk="0" hangingPunct="1">
+              <a:lnSpc>
+                <a:spcPct val="90000"/>
+              </a:lnSpc>
+              <a:spcBef>
+                <a:spcPts val="500"/>
+              </a:spcBef>
+              <a:buFont typeface="Arial" panose="020B0604020202020204" pitchFamily="34" charset="0"/>
+              <a:buChar char="•"/>
+              <a:defRPr sz="1800" kern="1200">
+                <a:solidFill>
+                  <a:schemeClr val="tx1"/>
+                </a:solidFill>
+                <a:latin typeface="+mn-lt"/>
+                <a:ea typeface="+mn-ea"/>
+                <a:cs typeface="+mn-cs"/>
+              </a:defRPr>
+            </a:lvl8pPr>
+            <a:lvl9pPr marL="3886200" indent="-228600" algn="l" defTabSz="914400" rtl="0" eaLnBrk="1" latinLnBrk="0" hangingPunct="1">
+              <a:lnSpc>
+                <a:spcPct val="90000"/>
+              </a:lnSpc>
+              <a:spcBef>
+                <a:spcPts val="500"/>
+              </a:spcBef>
+              <a:buFont typeface="Arial" panose="020B0604020202020204" pitchFamily="34" charset="0"/>
+              <a:buChar char="•"/>
+              <a:defRPr sz="1800" kern="1200">
+                <a:solidFill>
+                  <a:schemeClr val="tx1"/>
+                </a:solidFill>
+                <a:latin typeface="+mn-lt"/>
+                <a:ea typeface="+mn-ea"/>
+                <a:cs typeface="+mn-cs"/>
+              </a:defRPr>
+            </a:lvl9pPr>
+          </a:lstStyle>
+          <a:p>
+            <a:pPr lvl="1">
+              <a:lnSpc>
+                <a:spcPct val="100000"/>
+              </a:lnSpc>
+            </a:pPr>
+            <a:r>
+              <a:rPr lang="en-US" sz="2000" dirty="0"/>
+              <a:t>Independent of </a:t>
+            </a:r>
+            <a:r>
+              <a:rPr lang="en-US" sz="2000" dirty="0" err="1"/>
+              <a:t>wf’s</a:t>
+            </a:r>
+            <a:r>
+              <a:rPr lang="en-US" sz="2000" dirty="0"/>
+              <a:t> capability to operate at these SNRs</a:t>
+            </a:r>
+          </a:p>
+          <a:p>
+            <a:pPr lvl="1">
+              <a:lnSpc>
+                <a:spcPct val="100000"/>
+              </a:lnSpc>
+            </a:pPr>
+            <a:r>
+              <a:rPr lang="en-US" sz="2000" dirty="0">
+                <a:solidFill>
+                  <a:srgbClr val="FF0000"/>
+                </a:solidFill>
+              </a:rPr>
+              <a:t>What kind of SNRs can LoRa operate at with various configs and compare to these results</a:t>
+            </a:r>
+            <a:endParaRPr lang="en-US" sz="1600" dirty="0">
+              <a:solidFill>
+                <a:srgbClr val="FF0000"/>
+              </a:solidFill>
+            </a:endParaRPr>
+          </a:p>
+          <a:p>
+            <a:pPr lvl="1">
+              <a:lnSpc>
+                <a:spcPct val="100000"/>
+              </a:lnSpc>
+            </a:pPr>
+            <a:endParaRPr lang="en-US" sz="1800" dirty="0">
+              <a:solidFill>
+                <a:schemeClr val="bg1"/>
+              </a:solidFill>
+            </a:endParaRPr>
+          </a:p>
+          <a:p>
+            <a:pPr marL="457200" lvl="1" indent="0">
+              <a:buFont typeface="Arial" panose="020B0604020202020204" pitchFamily="34" charset="0"/>
+              <a:buNone/>
+            </a:pPr>
+            <a:endParaRPr lang="en-US" sz="2000" dirty="0">
+              <a:solidFill>
+                <a:schemeClr val="bg1"/>
+              </a:solidFill>
+            </a:endParaRPr>
+          </a:p>
+        </p:txBody>
+      </p:sp>
+    </p:spTree>
+    <p:extLst>
+      <p:ext uri="{BB962C8B-B14F-4D97-AF65-F5344CB8AC3E}">
+        <p14:creationId xmlns:p14="http://schemas.microsoft.com/office/powerpoint/2010/main" val="3648996990"/>
+      </p:ext>
+    </p:extLst>
+  </p:cSld>
+  <p:clrMapOvr>
+    <a:masterClrMapping/>
+  </p:clrMapOvr>
+</p:sld>
+</file>
+
+<file path=ppt/slides/slide8.xml><?xml version="1.0" encoding="utf-8"?>
+<p:sld xmlns:a="http://schemas.openxmlformats.org/drawingml/2006/main" xmlns:r="http://schemas.openxmlformats.org/officeDocument/2006/relationships" xmlns:p="http://schemas.openxmlformats.org/presentationml/2006/main">
+  <p:cSld>
+    <p:spTree>
+      <p:nvGrpSpPr>
+        <p:cNvPr id="1" name=""/>
+        <p:cNvGrpSpPr/>
+        <p:nvPr/>
+      </p:nvGrpSpPr>
+      <p:grpSpPr>
+        <a:xfrm>
+          <a:off x="0" y="0"/>
+          <a:ext cx="0" cy="0"/>
+          <a:chOff x="0" y="0"/>
+          <a:chExt cx="0" cy="0"/>
+        </a:xfrm>
+      </p:grpSpPr>
+    </p:spTree>
+    <p:extLst>
+      <p:ext uri="{BB962C8B-B14F-4D97-AF65-F5344CB8AC3E}">
+        <p14:creationId xmlns:p14="http://schemas.microsoft.com/office/powerpoint/2010/main" val="2058588754"/>
       </p:ext>
     </p:extLst>
   </p:cSld>

--- a/Misc files/Capstone Diagrams.pptx
+++ b/Misc files/Capstone Diagrams.pptx
@@ -958,7 +958,7 @@
           <a:p>
             <a:fld id="{20590B20-513A-4C6A-B322-257A1529B471}" type="datetimeFigureOut">
               <a:rPr lang="en-US" smtClean="0"/>
-              <a:t>5/29/2026</a:t>
+              <a:t>5/31/2026</a:t>
             </a:fld>
             <a:endParaRPr lang="en-US"/>
           </a:p>
@@ -1156,7 +1156,7 @@
           <a:p>
             <a:fld id="{20590B20-513A-4C6A-B322-257A1529B471}" type="datetimeFigureOut">
               <a:rPr lang="en-US" smtClean="0"/>
-              <a:t>5/29/2026</a:t>
+              <a:t>5/31/2026</a:t>
             </a:fld>
             <a:endParaRPr lang="en-US"/>
           </a:p>
@@ -1364,7 +1364,7 @@
           <a:p>
             <a:fld id="{20590B20-513A-4C6A-B322-257A1529B471}" type="datetimeFigureOut">
               <a:rPr lang="en-US" smtClean="0"/>
-              <a:t>5/29/2026</a:t>
+              <a:t>5/31/2026</a:t>
             </a:fld>
             <a:endParaRPr lang="en-US"/>
           </a:p>
@@ -1562,7 +1562,7 @@
           <a:p>
             <a:fld id="{20590B20-513A-4C6A-B322-257A1529B471}" type="datetimeFigureOut">
               <a:rPr lang="en-US" smtClean="0"/>
-              <a:t>5/29/2026</a:t>
+              <a:t>5/31/2026</a:t>
             </a:fld>
             <a:endParaRPr lang="en-US"/>
           </a:p>
@@ -1837,7 +1837,7 @@
           <a:p>
             <a:fld id="{20590B20-513A-4C6A-B322-257A1529B471}" type="datetimeFigureOut">
               <a:rPr lang="en-US" smtClean="0"/>
-              <a:t>5/29/2026</a:t>
+              <a:t>5/31/2026</a:t>
             </a:fld>
             <a:endParaRPr lang="en-US"/>
           </a:p>
@@ -2102,7 +2102,7 @@
           <a:p>
             <a:fld id="{20590B20-513A-4C6A-B322-257A1529B471}" type="datetimeFigureOut">
               <a:rPr lang="en-US" smtClean="0"/>
-              <a:t>5/29/2026</a:t>
+              <a:t>5/31/2026</a:t>
             </a:fld>
             <a:endParaRPr lang="en-US"/>
           </a:p>
@@ -2514,7 +2514,7 @@
           <a:p>
             <a:fld id="{20590B20-513A-4C6A-B322-257A1529B471}" type="datetimeFigureOut">
               <a:rPr lang="en-US" smtClean="0"/>
-              <a:t>5/29/2026</a:t>
+              <a:t>5/31/2026</a:t>
             </a:fld>
             <a:endParaRPr lang="en-US"/>
           </a:p>
@@ -2655,7 +2655,7 @@
           <a:p>
             <a:fld id="{20590B20-513A-4C6A-B322-257A1529B471}" type="datetimeFigureOut">
               <a:rPr lang="en-US" smtClean="0"/>
-              <a:t>5/29/2026</a:t>
+              <a:t>5/31/2026</a:t>
             </a:fld>
             <a:endParaRPr lang="en-US"/>
           </a:p>
@@ -2768,7 +2768,7 @@
           <a:p>
             <a:fld id="{20590B20-513A-4C6A-B322-257A1529B471}" type="datetimeFigureOut">
               <a:rPr lang="en-US" smtClean="0"/>
-              <a:t>5/29/2026</a:t>
+              <a:t>5/31/2026</a:t>
             </a:fld>
             <a:endParaRPr lang="en-US"/>
           </a:p>
@@ -3079,7 +3079,7 @@
           <a:p>
             <a:fld id="{20590B20-513A-4C6A-B322-257A1529B471}" type="datetimeFigureOut">
               <a:rPr lang="en-US" smtClean="0"/>
-              <a:t>5/29/2026</a:t>
+              <a:t>5/31/2026</a:t>
             </a:fld>
             <a:endParaRPr lang="en-US"/>
           </a:p>
@@ -3367,7 +3367,7 @@
           <a:p>
             <a:fld id="{20590B20-513A-4C6A-B322-257A1529B471}" type="datetimeFigureOut">
               <a:rPr lang="en-US" smtClean="0"/>
-              <a:t>5/29/2026</a:t>
+              <a:t>5/31/2026</a:t>
             </a:fld>
             <a:endParaRPr lang="en-US"/>
           </a:p>
@@ -3608,7 +3608,7 @@
           <a:p>
             <a:fld id="{20590B20-513A-4C6A-B322-257A1529B471}" type="datetimeFigureOut">
               <a:rPr lang="en-US" smtClean="0"/>
-              <a:t>5/29/2026</a:t>
+              <a:t>5/31/2026</a:t>
             </a:fld>
             <a:endParaRPr lang="en-US"/>
           </a:p>
@@ -8549,6 +8549,55 @@
               <a:rPr lang="en-US" dirty="0"/>
               <a:t>X = 480nm</a:t>
             </a:r>
+          </a:p>
+        </p:txBody>
+      </p:sp>
+      <p:sp>
+        <p:nvSpPr>
+          <p:cNvPr id="2" name="Oval 1">
+            <a:extLst>
+              <a:ext uri="{FF2B5EF4-FFF2-40B4-BE49-F238E27FC236}">
+                <a16:creationId xmlns:a16="http://schemas.microsoft.com/office/drawing/2014/main" id="{BBB4B639-F163-8F5F-CF95-6A0D39934655}"/>
+              </a:ext>
+            </a:extLst>
+          </p:cNvPr>
+          <p:cNvSpPr/>
+          <p:nvPr/>
+        </p:nvSpPr>
+        <p:spPr>
+          <a:xfrm>
+            <a:off x="4059613" y="2619923"/>
+            <a:ext cx="175260" cy="167640"/>
+          </a:xfrm>
+          <a:prstGeom prst="ellipse">
+            <a:avLst/>
+          </a:prstGeom>
+          <a:solidFill>
+            <a:srgbClr val="FF0000"/>
+          </a:solidFill>
+        </p:spPr>
+        <p:style>
+          <a:lnRef idx="2">
+            <a:schemeClr val="accent1">
+              <a:shade val="15000"/>
+            </a:schemeClr>
+          </a:lnRef>
+          <a:fillRef idx="1">
+            <a:schemeClr val="accent1"/>
+          </a:fillRef>
+          <a:effectRef idx="0">
+            <a:schemeClr val="accent1"/>
+          </a:effectRef>
+          <a:fontRef idx="minor">
+            <a:schemeClr val="lt1"/>
+          </a:fontRef>
+        </p:style>
+        <p:txBody>
+          <a:bodyPr rtlCol="0" anchor="ctr"/>
+          <a:lstStyle/>
+          <a:p>
+            <a:pPr algn="ctr"/>
+            <a:endParaRPr lang="en-US"/>
           </a:p>
         </p:txBody>
       </p:sp>

--- a/Misc files/Capstone Diagrams.pptx
+++ b/Misc files/Capstone Diagrams.pptx
@@ -958,7 +958,7 @@
           <a:p>
             <a:fld id="{20590B20-513A-4C6A-B322-257A1529B471}" type="datetimeFigureOut">
               <a:rPr lang="en-US" smtClean="0"/>
-              <a:t>5/31/2026</a:t>
+              <a:t>6/7/2026</a:t>
             </a:fld>
             <a:endParaRPr lang="en-US"/>
           </a:p>
@@ -1156,7 +1156,7 @@
           <a:p>
             <a:fld id="{20590B20-513A-4C6A-B322-257A1529B471}" type="datetimeFigureOut">
               <a:rPr lang="en-US" smtClean="0"/>
-              <a:t>5/31/2026</a:t>
+              <a:t>6/7/2026</a:t>
             </a:fld>
             <a:endParaRPr lang="en-US"/>
           </a:p>
@@ -1364,7 +1364,7 @@
           <a:p>
             <a:fld id="{20590B20-513A-4C6A-B322-257A1529B471}" type="datetimeFigureOut">
               <a:rPr lang="en-US" smtClean="0"/>
-              <a:t>5/31/2026</a:t>
+              <a:t>6/7/2026</a:t>
             </a:fld>
             <a:endParaRPr lang="en-US"/>
           </a:p>
@@ -1562,7 +1562,7 @@
           <a:p>
             <a:fld id="{20590B20-513A-4C6A-B322-257A1529B471}" type="datetimeFigureOut">
               <a:rPr lang="en-US" smtClean="0"/>
-              <a:t>5/31/2026</a:t>
+              <a:t>6/7/2026</a:t>
             </a:fld>
             <a:endParaRPr lang="en-US"/>
           </a:p>
@@ -1837,7 +1837,7 @@
           <a:p>
             <a:fld id="{20590B20-513A-4C6A-B322-257A1529B471}" type="datetimeFigureOut">
               <a:rPr lang="en-US" smtClean="0"/>
-              <a:t>5/31/2026</a:t>
+              <a:t>6/7/2026</a:t>
             </a:fld>
             <a:endParaRPr lang="en-US"/>
           </a:p>
@@ -2102,7 +2102,7 @@
           <a:p>
             <a:fld id="{20590B20-513A-4C6A-B322-257A1529B471}" type="datetimeFigureOut">
               <a:rPr lang="en-US" smtClean="0"/>
-              <a:t>5/31/2026</a:t>
+              <a:t>6/7/2026</a:t>
             </a:fld>
             <a:endParaRPr lang="en-US"/>
           </a:p>
@@ -2514,7 +2514,7 @@
           <a:p>
             <a:fld id="{20590B20-513A-4C6A-B322-257A1529B471}" type="datetimeFigureOut">
               <a:rPr lang="en-US" smtClean="0"/>
-              <a:t>5/31/2026</a:t>
+              <a:t>6/7/2026</a:t>
             </a:fld>
             <a:endParaRPr lang="en-US"/>
           </a:p>
@@ -2655,7 +2655,7 @@
           <a:p>
             <a:fld id="{20590B20-513A-4C6A-B322-257A1529B471}" type="datetimeFigureOut">
               <a:rPr lang="en-US" smtClean="0"/>
-              <a:t>5/31/2026</a:t>
+              <a:t>6/7/2026</a:t>
             </a:fld>
             <a:endParaRPr lang="en-US"/>
           </a:p>
@@ -2768,7 +2768,7 @@
           <a:p>
             <a:fld id="{20590B20-513A-4C6A-B322-257A1529B471}" type="datetimeFigureOut">
               <a:rPr lang="en-US" smtClean="0"/>
-              <a:t>5/31/2026</a:t>
+              <a:t>6/7/2026</a:t>
             </a:fld>
             <a:endParaRPr lang="en-US"/>
           </a:p>
@@ -3079,7 +3079,7 @@
           <a:p>
             <a:fld id="{20590B20-513A-4C6A-B322-257A1529B471}" type="datetimeFigureOut">
               <a:rPr lang="en-US" smtClean="0"/>
-              <a:t>5/31/2026</a:t>
+              <a:t>6/7/2026</a:t>
             </a:fld>
             <a:endParaRPr lang="en-US"/>
           </a:p>
@@ -3367,7 +3367,7 @@
           <a:p>
             <a:fld id="{20590B20-513A-4C6A-B322-257A1529B471}" type="datetimeFigureOut">
               <a:rPr lang="en-US" smtClean="0"/>
-              <a:t>5/31/2026</a:t>
+              <a:t>6/7/2026</a:t>
             </a:fld>
             <a:endParaRPr lang="en-US"/>
           </a:p>
@@ -3608,7 +3608,7 @@
           <a:p>
             <a:fld id="{20590B20-513A-4C6A-B322-257A1529B471}" type="datetimeFigureOut">
               <a:rPr lang="en-US" smtClean="0"/>
-              <a:t>5/31/2026</a:t>
+              <a:t>6/7/2026</a:t>
             </a:fld>
             <a:endParaRPr lang="en-US"/>
           </a:p>
@@ -4189,7 +4189,7 @@
             <a:pPr algn="ctr"/>
             <a:r>
               <a:rPr lang="en-US" dirty="0"/>
-              <a:t>Radio Channel Estimator (RCE)</a:t>
+              <a:t>Radio Frequency Network (RFN)</a:t>
             </a:r>
             <a:br>
               <a:rPr lang="en-US" dirty="0"/>
@@ -4204,20 +4204,6 @@
             <a:r>
               <a:rPr lang="en-US" dirty="0"/>
               <a:t>(Delay)</a:t>
-            </a:r>
-          </a:p>
-          <a:p>
-            <a:pPr algn="ctr"/>
-            <a:r>
-              <a:rPr lang="en-US" dirty="0"/>
-              <a:t>(Doppler)</a:t>
-            </a:r>
-          </a:p>
-          <a:p>
-            <a:pPr algn="ctr"/>
-            <a:r>
-              <a:rPr lang="en-US" dirty="0"/>
-              <a:t>(Multipath)</a:t>
             </a:r>
           </a:p>
         </p:txBody>
@@ -5078,6 +5064,220 @@
               <a:srgbClr val="FF0000"/>
             </a:solidFill>
             <a:tailEnd type="triangle"/>
+          </a:ln>
+        </p:spPr>
+        <p:style>
+          <a:lnRef idx="2">
+            <a:schemeClr val="accent1"/>
+          </a:lnRef>
+          <a:fillRef idx="0">
+            <a:schemeClr val="accent1"/>
+          </a:fillRef>
+          <a:effectRef idx="1">
+            <a:schemeClr val="accent1"/>
+          </a:effectRef>
+          <a:fontRef idx="minor">
+            <a:schemeClr val="tx1"/>
+          </a:fontRef>
+        </p:style>
+      </p:cxnSp>
+      <p:sp>
+        <p:nvSpPr>
+          <p:cNvPr id="2" name="TextBox 1">
+            <a:extLst>
+              <a:ext uri="{FF2B5EF4-FFF2-40B4-BE49-F238E27FC236}">
+                <a16:creationId xmlns:a16="http://schemas.microsoft.com/office/drawing/2014/main" id="{FC42B9A3-BDBC-1727-2EC1-C9E3E71A6C67}"/>
+              </a:ext>
+            </a:extLst>
+          </p:cNvPr>
+          <p:cNvSpPr txBox="1"/>
+          <p:nvPr/>
+        </p:nvSpPr>
+        <p:spPr>
+          <a:xfrm>
+            <a:off x="5968749" y="803787"/>
+            <a:ext cx="2169441" cy="369332"/>
+          </a:xfrm>
+          <a:prstGeom prst="rect">
+            <a:avLst/>
+          </a:prstGeom>
+          <a:noFill/>
+          <a:ln>
+            <a:solidFill>
+              <a:schemeClr val="tx1"/>
+            </a:solidFill>
+          </a:ln>
+        </p:spPr>
+        <p:txBody>
+          <a:bodyPr wrap="square" rtlCol="0">
+            <a:spAutoFit/>
+          </a:bodyPr>
+          <a:lstStyle/>
+          <a:p>
+            <a:r>
+              <a:rPr lang="en-US" dirty="0"/>
+              <a:t>Script input control</a:t>
+            </a:r>
+          </a:p>
+        </p:txBody>
+      </p:sp>
+      <p:cxnSp>
+        <p:nvCxnSpPr>
+          <p:cNvPr id="5" name="Straight Arrow Connector 4">
+            <a:extLst>
+              <a:ext uri="{FF2B5EF4-FFF2-40B4-BE49-F238E27FC236}">
+                <a16:creationId xmlns:a16="http://schemas.microsoft.com/office/drawing/2014/main" id="{77423025-4A6C-F90F-F31D-F0B7B1CE80C1}"/>
+              </a:ext>
+            </a:extLst>
+          </p:cNvPr>
+          <p:cNvCxnSpPr>
+            <a:cxnSpLocks/>
+            <a:stCxn id="2" idx="2"/>
+            <a:endCxn id="15" idx="0"/>
+          </p:cNvCxnSpPr>
+          <p:nvPr/>
+        </p:nvCxnSpPr>
+        <p:spPr>
+          <a:xfrm>
+            <a:off x="7053470" y="1173119"/>
+            <a:ext cx="0" cy="323746"/>
+          </a:xfrm>
+          <a:prstGeom prst="straightConnector1">
+            <a:avLst/>
+          </a:prstGeom>
+          <a:ln>
+            <a:solidFill>
+              <a:srgbClr val="FF0000"/>
+            </a:solidFill>
+            <a:tailEnd type="triangle"/>
+          </a:ln>
+        </p:spPr>
+        <p:style>
+          <a:lnRef idx="2">
+            <a:schemeClr val="accent1"/>
+          </a:lnRef>
+          <a:fillRef idx="0">
+            <a:schemeClr val="accent1"/>
+          </a:fillRef>
+          <a:effectRef idx="1">
+            <a:schemeClr val="accent1"/>
+          </a:effectRef>
+          <a:fontRef idx="minor">
+            <a:schemeClr val="tx1"/>
+          </a:fontRef>
+        </p:style>
+      </p:cxnSp>
+      <p:sp>
+        <p:nvSpPr>
+          <p:cNvPr id="10" name="TextBox 9">
+            <a:extLst>
+              <a:ext uri="{FF2B5EF4-FFF2-40B4-BE49-F238E27FC236}">
+                <a16:creationId xmlns:a16="http://schemas.microsoft.com/office/drawing/2014/main" id="{B9ACCFAB-44A9-865A-C47A-CC2B3875F3D7}"/>
+              </a:ext>
+            </a:extLst>
+          </p:cNvPr>
+          <p:cNvSpPr txBox="1"/>
+          <p:nvPr/>
+        </p:nvSpPr>
+        <p:spPr>
+          <a:xfrm>
+            <a:off x="2287315" y="839138"/>
+            <a:ext cx="2262158" cy="646331"/>
+          </a:xfrm>
+          <a:prstGeom prst="rect">
+            <a:avLst/>
+          </a:prstGeom>
+          <a:noFill/>
+        </p:spPr>
+        <p:txBody>
+          <a:bodyPr wrap="none" rtlCol="0">
+            <a:spAutoFit/>
+          </a:bodyPr>
+          <a:lstStyle/>
+          <a:p>
+            <a:r>
+              <a:rPr lang="en-US" dirty="0"/>
+              <a:t>RF Cable connection</a:t>
+            </a:r>
+          </a:p>
+          <a:p>
+            <a:r>
+              <a:rPr lang="en-US" dirty="0"/>
+              <a:t>Digital/Data I/O</a:t>
+            </a:r>
+          </a:p>
+        </p:txBody>
+      </p:sp>
+      <p:cxnSp>
+        <p:nvCxnSpPr>
+          <p:cNvPr id="11" name="Straight Connector 10">
+            <a:extLst>
+              <a:ext uri="{FF2B5EF4-FFF2-40B4-BE49-F238E27FC236}">
+                <a16:creationId xmlns:a16="http://schemas.microsoft.com/office/drawing/2014/main" id="{85D0CAA7-83DA-8494-7EEB-A8E5636D4CE8}"/>
+              </a:ext>
+            </a:extLst>
+          </p:cNvPr>
+          <p:cNvCxnSpPr>
+            <a:cxnSpLocks/>
+          </p:cNvCxnSpPr>
+          <p:nvPr/>
+        </p:nvCxnSpPr>
+        <p:spPr>
+          <a:xfrm>
+            <a:off x="1729263" y="988453"/>
+            <a:ext cx="558052" cy="0"/>
+          </a:xfrm>
+          <a:prstGeom prst="line">
+            <a:avLst/>
+          </a:prstGeom>
+          <a:ln>
+            <a:headEnd type="triangle" w="med" len="med"/>
+            <a:tailEnd type="triangle" w="med" len="med"/>
+          </a:ln>
+        </p:spPr>
+        <p:style>
+          <a:lnRef idx="2">
+            <a:schemeClr val="accent1"/>
+          </a:lnRef>
+          <a:fillRef idx="0">
+            <a:schemeClr val="accent1"/>
+          </a:fillRef>
+          <a:effectRef idx="1">
+            <a:schemeClr val="accent1"/>
+          </a:effectRef>
+          <a:fontRef idx="minor">
+            <a:schemeClr val="tx1"/>
+          </a:fontRef>
+        </p:style>
+      </p:cxnSp>
+      <p:cxnSp>
+        <p:nvCxnSpPr>
+          <p:cNvPr id="14" name="Straight Connector 13">
+            <a:extLst>
+              <a:ext uri="{FF2B5EF4-FFF2-40B4-BE49-F238E27FC236}">
+                <a16:creationId xmlns:a16="http://schemas.microsoft.com/office/drawing/2014/main" id="{EEF878D3-FC11-697E-21BA-879C7E4AEA3F}"/>
+              </a:ext>
+            </a:extLst>
+          </p:cNvPr>
+          <p:cNvCxnSpPr>
+            <a:cxnSpLocks/>
+          </p:cNvCxnSpPr>
+          <p:nvPr/>
+        </p:nvCxnSpPr>
+        <p:spPr>
+          <a:xfrm>
+            <a:off x="1729263" y="1321300"/>
+            <a:ext cx="558052" cy="0"/>
+          </a:xfrm>
+          <a:prstGeom prst="line">
+            <a:avLst/>
+          </a:prstGeom>
+          <a:ln>
+            <a:solidFill>
+              <a:srgbClr val="FF0000"/>
+            </a:solidFill>
+            <a:headEnd type="triangle" w="med" len="med"/>
+            <a:tailEnd type="triangle" w="med" len="med"/>
           </a:ln>
         </p:spPr>
         <p:style>
@@ -5166,15 +5366,7 @@
           <a:p>
             <a:r>
               <a:rPr lang="en-US" dirty="0"/>
-              <a:t>Primary </a:t>
-            </a:r>
-            <a:r>
-              <a:rPr lang="en-US" dirty="0" err="1"/>
-              <a:t>Heltec</a:t>
-            </a:r>
-            <a:r>
-              <a:rPr lang="en-US" dirty="0"/>
-              <a:t> Dev Board</a:t>
+              <a:t>Primary Heltec Dev Board</a:t>
             </a:r>
           </a:p>
         </p:txBody>
@@ -5643,15 +5835,7 @@
           <a:p>
             <a:r>
               <a:rPr lang="en-US" dirty="0"/>
-              <a:t>Remote </a:t>
-            </a:r>
-            <a:r>
-              <a:rPr lang="en-US" dirty="0" err="1"/>
-              <a:t>Heltec</a:t>
-            </a:r>
-            <a:r>
-              <a:rPr lang="en-US" dirty="0"/>
-              <a:t> Dev Board</a:t>
+              <a:t>Remote Heltec Dev Board</a:t>
             </a:r>
           </a:p>
         </p:txBody>
@@ -5806,6 +5990,170 @@
             <a:ext cx="267444" cy="4088"/>
           </a:xfrm>
           <a:prstGeom prst="line">
+            <a:avLst/>
+          </a:prstGeom>
+          <a:ln>
+            <a:headEnd type="triangle" w="med" len="med"/>
+            <a:tailEnd type="triangle" w="med" len="med"/>
+          </a:ln>
+        </p:spPr>
+        <p:style>
+          <a:lnRef idx="2">
+            <a:schemeClr val="accent1"/>
+          </a:lnRef>
+          <a:fillRef idx="0">
+            <a:schemeClr val="accent1"/>
+          </a:fillRef>
+          <a:effectRef idx="1">
+            <a:schemeClr val="accent1"/>
+          </a:effectRef>
+          <a:fontRef idx="minor">
+            <a:schemeClr val="tx1"/>
+          </a:fontRef>
+        </p:style>
+      </p:cxnSp>
+      <p:sp>
+        <p:nvSpPr>
+          <p:cNvPr id="8" name="TextBox 7">
+            <a:extLst>
+              <a:ext uri="{FF2B5EF4-FFF2-40B4-BE49-F238E27FC236}">
+                <a16:creationId xmlns:a16="http://schemas.microsoft.com/office/drawing/2014/main" id="{5EBA9C27-5B55-1094-168F-8C55A0BDACB7}"/>
+              </a:ext>
+            </a:extLst>
+          </p:cNvPr>
+          <p:cNvSpPr txBox="1"/>
+          <p:nvPr/>
+        </p:nvSpPr>
+        <p:spPr>
+          <a:xfrm>
+            <a:off x="1076818" y="2960780"/>
+            <a:ext cx="1246078" cy="646331"/>
+          </a:xfrm>
+          <a:prstGeom prst="rect">
+            <a:avLst/>
+          </a:prstGeom>
+          <a:noFill/>
+          <a:ln>
+            <a:solidFill>
+              <a:schemeClr val="tx1"/>
+            </a:solidFill>
+          </a:ln>
+        </p:spPr>
+        <p:txBody>
+          <a:bodyPr wrap="square" rtlCol="0">
+            <a:spAutoFit/>
+          </a:bodyPr>
+          <a:lstStyle/>
+          <a:p>
+            <a:r>
+              <a:rPr lang="en-US"/>
+              <a:t>Data Capture</a:t>
+            </a:r>
+            <a:endParaRPr lang="en-US" dirty="0"/>
+          </a:p>
+        </p:txBody>
+      </p:sp>
+      <p:sp>
+        <p:nvSpPr>
+          <p:cNvPr id="15" name="TextBox 14">
+            <a:extLst>
+              <a:ext uri="{FF2B5EF4-FFF2-40B4-BE49-F238E27FC236}">
+                <a16:creationId xmlns:a16="http://schemas.microsoft.com/office/drawing/2014/main" id="{E100229A-9C64-37F0-E315-8216B8C866BD}"/>
+              </a:ext>
+            </a:extLst>
+          </p:cNvPr>
+          <p:cNvSpPr txBox="1"/>
+          <p:nvPr/>
+        </p:nvSpPr>
+        <p:spPr>
+          <a:xfrm>
+            <a:off x="4397133" y="5282697"/>
+            <a:ext cx="1766493" cy="369332"/>
+          </a:xfrm>
+          <a:prstGeom prst="rect">
+            <a:avLst/>
+          </a:prstGeom>
+          <a:noFill/>
+          <a:ln>
+            <a:solidFill>
+              <a:schemeClr val="tx1"/>
+            </a:solidFill>
+          </a:ln>
+        </p:spPr>
+        <p:txBody>
+          <a:bodyPr wrap="square" rtlCol="0">
+            <a:spAutoFit/>
+          </a:bodyPr>
+          <a:lstStyle/>
+          <a:p>
+            <a:r>
+              <a:rPr lang="en-US" dirty="0"/>
+              <a:t>Test Application</a:t>
+            </a:r>
+          </a:p>
+        </p:txBody>
+      </p:sp>
+      <p:sp>
+        <p:nvSpPr>
+          <p:cNvPr id="2" name="TextBox 1">
+            <a:extLst>
+              <a:ext uri="{FF2B5EF4-FFF2-40B4-BE49-F238E27FC236}">
+                <a16:creationId xmlns:a16="http://schemas.microsoft.com/office/drawing/2014/main" id="{4C562EF5-DB57-445D-650F-E1071B128A95}"/>
+              </a:ext>
+            </a:extLst>
+          </p:cNvPr>
+          <p:cNvSpPr txBox="1"/>
+          <p:nvPr/>
+        </p:nvSpPr>
+        <p:spPr>
+          <a:xfrm>
+            <a:off x="8534213" y="3822890"/>
+            <a:ext cx="646733" cy="369332"/>
+          </a:xfrm>
+          <a:prstGeom prst="rect">
+            <a:avLst/>
+          </a:prstGeom>
+          <a:noFill/>
+          <a:ln>
+            <a:solidFill>
+              <a:schemeClr val="tx1"/>
+            </a:solidFill>
+          </a:ln>
+        </p:spPr>
+        <p:txBody>
+          <a:bodyPr wrap="square" rtlCol="0">
+            <a:spAutoFit/>
+          </a:bodyPr>
+          <a:lstStyle/>
+          <a:p>
+            <a:r>
+              <a:rPr lang="en-US" dirty="0"/>
+              <a:t>RFN</a:t>
+            </a:r>
+          </a:p>
+        </p:txBody>
+      </p:sp>
+      <p:cxnSp>
+        <p:nvCxnSpPr>
+          <p:cNvPr id="7" name="Connector: Elbow 6">
+            <a:extLst>
+              <a:ext uri="{FF2B5EF4-FFF2-40B4-BE49-F238E27FC236}">
+                <a16:creationId xmlns:a16="http://schemas.microsoft.com/office/drawing/2014/main" id="{AC8F5D0B-86F0-7C71-983D-92793E19CECF}"/>
+              </a:ext>
+            </a:extLst>
+          </p:cNvPr>
+          <p:cNvCxnSpPr>
+            <a:stCxn id="14" idx="3"/>
+            <a:endCxn id="2" idx="0"/>
+          </p:cNvCxnSpPr>
+          <p:nvPr/>
+        </p:nvCxnSpPr>
+        <p:spPr>
+          <a:xfrm>
+            <a:off x="7931612" y="2802220"/>
+            <a:ext cx="925968" cy="1020670"/>
+          </a:xfrm>
+          <a:prstGeom prst="bentConnector2">
             <a:avLst/>
           </a:prstGeom>
           <a:ln>
@@ -5830,29 +6178,26 @@
       </p:cxnSp>
       <p:cxnSp>
         <p:nvCxnSpPr>
-          <p:cNvPr id="61" name="Connector: Elbow 60">
-            <a:extLst>
-              <a:ext uri="{FF2B5EF4-FFF2-40B4-BE49-F238E27FC236}">
-                <a16:creationId xmlns:a16="http://schemas.microsoft.com/office/drawing/2014/main" id="{7FE544F3-0D5C-180E-DF4C-D0B3AA172ACA}"/>
+          <p:cNvPr id="10" name="Connector: Elbow 9">
+            <a:extLst>
+              <a:ext uri="{FF2B5EF4-FFF2-40B4-BE49-F238E27FC236}">
+                <a16:creationId xmlns:a16="http://schemas.microsoft.com/office/drawing/2014/main" id="{178867D9-0B4D-B304-D7D7-EBC9D02C0BF3}"/>
               </a:ext>
             </a:extLst>
           </p:cNvPr>
           <p:cNvCxnSpPr>
-            <a:cxnSpLocks/>
-            <a:stCxn id="19" idx="3"/>
-            <a:endCxn id="57" idx="3"/>
+            <a:stCxn id="2" idx="2"/>
+            <a:endCxn id="56" idx="3"/>
           </p:cNvCxnSpPr>
           <p:nvPr/>
         </p:nvCxnSpPr>
         <p:spPr>
-          <a:xfrm>
-            <a:off x="7931612" y="2954026"/>
-            <a:ext cx="12700" cy="2153224"/>
-          </a:xfrm>
-          <a:prstGeom prst="bentConnector3">
-            <a:avLst>
-              <a:gd name="adj1" fmla="val 2739134"/>
-            </a:avLst>
+          <a:xfrm rot="5400000">
+            <a:off x="8012985" y="4110849"/>
+            <a:ext cx="763222" cy="925968"/>
+          </a:xfrm>
+          <a:prstGeom prst="bentConnector2">
+            <a:avLst/>
           </a:prstGeom>
           <a:ln>
             <a:headEnd type="triangle" w="med" len="med"/>
@@ -5874,87 +6219,6 @@
           </a:fontRef>
         </p:style>
       </p:cxnSp>
-      <p:sp>
-        <p:nvSpPr>
-          <p:cNvPr id="8" name="TextBox 7">
-            <a:extLst>
-              <a:ext uri="{FF2B5EF4-FFF2-40B4-BE49-F238E27FC236}">
-                <a16:creationId xmlns:a16="http://schemas.microsoft.com/office/drawing/2014/main" id="{5EBA9C27-5B55-1094-168F-8C55A0BDACB7}"/>
-              </a:ext>
-            </a:extLst>
-          </p:cNvPr>
-          <p:cNvSpPr txBox="1"/>
-          <p:nvPr/>
-        </p:nvSpPr>
-        <p:spPr>
-          <a:xfrm>
-            <a:off x="1076818" y="2960780"/>
-            <a:ext cx="1246078" cy="646331"/>
-          </a:xfrm>
-          <a:prstGeom prst="rect">
-            <a:avLst/>
-          </a:prstGeom>
-          <a:noFill/>
-          <a:ln>
-            <a:solidFill>
-              <a:schemeClr val="tx1"/>
-            </a:solidFill>
-          </a:ln>
-        </p:spPr>
-        <p:txBody>
-          <a:bodyPr wrap="square" rtlCol="0">
-            <a:spAutoFit/>
-          </a:bodyPr>
-          <a:lstStyle/>
-          <a:p>
-            <a:r>
-              <a:rPr lang="en-US"/>
-              <a:t>Data Capture</a:t>
-            </a:r>
-            <a:endParaRPr lang="en-US" dirty="0"/>
-          </a:p>
-        </p:txBody>
-      </p:sp>
-      <p:sp>
-        <p:nvSpPr>
-          <p:cNvPr id="15" name="TextBox 14">
-            <a:extLst>
-              <a:ext uri="{FF2B5EF4-FFF2-40B4-BE49-F238E27FC236}">
-                <a16:creationId xmlns:a16="http://schemas.microsoft.com/office/drawing/2014/main" id="{E100229A-9C64-37F0-E315-8216B8C866BD}"/>
-              </a:ext>
-            </a:extLst>
-          </p:cNvPr>
-          <p:cNvSpPr txBox="1"/>
-          <p:nvPr/>
-        </p:nvSpPr>
-        <p:spPr>
-          <a:xfrm>
-            <a:off x="4397133" y="5282697"/>
-            <a:ext cx="1766493" cy="369332"/>
-          </a:xfrm>
-          <a:prstGeom prst="rect">
-            <a:avLst/>
-          </a:prstGeom>
-          <a:noFill/>
-          <a:ln>
-            <a:solidFill>
-              <a:schemeClr val="tx1"/>
-            </a:solidFill>
-          </a:ln>
-        </p:spPr>
-        <p:txBody>
-          <a:bodyPr wrap="square" rtlCol="0">
-            <a:spAutoFit/>
-          </a:bodyPr>
-          <a:lstStyle/>
-          <a:p>
-            <a:r>
-              <a:rPr lang="en-US" dirty="0"/>
-              <a:t>Test Application</a:t>
-            </a:r>
-          </a:p>
-        </p:txBody>
-      </p:sp>
     </p:spTree>
     <p:extLst>
       <p:ext uri="{BB962C8B-B14F-4D97-AF65-F5344CB8AC3E}">
@@ -7885,7 +8149,7 @@
         </p:nvSpPr>
         <p:spPr>
           <a:xfrm>
-            <a:off x="2510790" y="1320760"/>
+            <a:off x="2510790" y="1020183"/>
             <a:ext cx="601703" cy="369332"/>
           </a:xfrm>
           <a:prstGeom prst="rect">
@@ -8549,55 +8813,6 @@
               <a:rPr lang="en-US" dirty="0"/>
               <a:t>X = 480nm</a:t>
             </a:r>
-          </a:p>
-        </p:txBody>
-      </p:sp>
-      <p:sp>
-        <p:nvSpPr>
-          <p:cNvPr id="2" name="Oval 1">
-            <a:extLst>
-              <a:ext uri="{FF2B5EF4-FFF2-40B4-BE49-F238E27FC236}">
-                <a16:creationId xmlns:a16="http://schemas.microsoft.com/office/drawing/2014/main" id="{BBB4B639-F163-8F5F-CF95-6A0D39934655}"/>
-              </a:ext>
-            </a:extLst>
-          </p:cNvPr>
-          <p:cNvSpPr/>
-          <p:nvPr/>
-        </p:nvSpPr>
-        <p:spPr>
-          <a:xfrm>
-            <a:off x="4059613" y="2619923"/>
-            <a:ext cx="175260" cy="167640"/>
-          </a:xfrm>
-          <a:prstGeom prst="ellipse">
-            <a:avLst/>
-          </a:prstGeom>
-          <a:solidFill>
-            <a:srgbClr val="FF0000"/>
-          </a:solidFill>
-        </p:spPr>
-        <p:style>
-          <a:lnRef idx="2">
-            <a:schemeClr val="accent1">
-              <a:shade val="15000"/>
-            </a:schemeClr>
-          </a:lnRef>
-          <a:fillRef idx="1">
-            <a:schemeClr val="accent1"/>
-          </a:fillRef>
-          <a:effectRef idx="0">
-            <a:schemeClr val="accent1"/>
-          </a:effectRef>
-          <a:fontRef idx="minor">
-            <a:schemeClr val="lt1"/>
-          </a:fontRef>
-        </p:style>
-        <p:txBody>
-          <a:bodyPr rtlCol="0" anchor="ctr"/>
-          <a:lstStyle/>
-          <a:p>
-            <a:pPr algn="ctr"/>
-            <a:endParaRPr lang="en-US"/>
           </a:p>
         </p:txBody>
       </p:sp>
